--- a/docs/presentation/v8/going-v8-class-presentation.pptx
+++ b/docs/presentation/v8/going-v8-class-presentation.pptx
@@ -623,1683 +623,1683 @@
 </file>
 
 <file path=ppt/notesSlides/notesSlide1.xml><?xml version="1.0" encoding="utf-8"?>
-<p:notes xmlns:a="http://schemas.openxmlformats.org/drawingml/2006/main" xmlns:r="http://schemas.openxmlformats.org/officeDocument/2006/relationships" xmlns:p="http://schemas.openxmlformats.org/presentationml/2006/main" xmlns:m="http://schemas.openxmlformats.org/officeDocument/2006/math" xmlns:a14="http://schemas.microsoft.com/office/drawing/2010/main" showMasterSp="1" showMasterPhAnim="1">
-  <p:cSld>
-    <p:spTree>
-      <p:nvGrpSpPr>
-        <p:cNvPr id="1" name=""/>
-        <p:cNvGrpSpPr/>
-        <p:nvPr/>
-      </p:nvGrpSpPr>
-      <p:grpSpPr>
-        <a:xfrm>
-          <a:off x="0" y="0"/>
-          <a:ext cx="0" cy="0"/>
-          <a:chOff x="0" y="0"/>
-          <a:chExt cx="0" cy="0"/>
-        </a:xfrm>
-      </p:grpSpPr>
-      <p:sp>
-        <p:nvSpPr>
-          <p:cNvPr id="71" name="Shape 71"/>
-          <p:cNvSpPr/>
-          <p:nvPr>
-            <p:ph type="sldImg"/>
-          </p:nvPr>
-        </p:nvSpPr>
-        <p:spPr>
-          <a:prstGeom prst="rect">
-            <a:avLst/>
-          </a:prstGeom>
-        </p:spPr>
-        <p:txBody>
-          <a:bodyPr/>
-          <a:lstStyle/>
-          <a:p>
-            <a:pPr/>
-          </a:p>
-        </p:txBody>
-      </p:sp>
-      <p:sp>
-        <p:nvSpPr>
-          <p:cNvPr id="72" name="Shape 72"/>
-          <p:cNvSpPr/>
-          <p:nvPr>
-            <p:ph type="body" sz="quarter" idx="1"/>
-          </p:nvPr>
-        </p:nvSpPr>
-        <p:spPr>
-          <a:prstGeom prst="rect">
-            <a:avLst/>
-          </a:prstGeom>
-        </p:spPr>
-        <p:txBody>
-          <a:bodyPr/>
-          <a:lstStyle/>
-          <a:p>
-            <a:pPr>
-              <a:buNone/>
-            </a:pPr>
-            <a:r>
-              <a:t>[1장 · 약 40초]</a:t>
-            </a:r>
-          </a:p>
-          <a:p>
-            <a:pPr>
-              <a:buNone/>
-            </a:pPr>
-            <a:r>
-              <a:t/>
-            </a:r>
-          </a:p>
-          <a:p>
-            <a:pPr>
-              <a:buNone/>
-            </a:pPr>
-            <a:r>
-              <a:t>안녕하세요. 제가 만든 여행 서비스, 고잉을 소개하겠습니다.</a:t>
-            </a:r>
-          </a:p>
-          <a:p>
-            <a:pPr>
-              <a:buNone/>
-            </a:pPr>
-            <a:r>
-              <a:t/>
-            </a:r>
-          </a:p>
-          <a:p>
-            <a:pPr>
-              <a:buNone/>
-            </a:pPr>
-            <a:r>
-              <a:t>저는 여행하는 걸 좋아하고, 새로운 음식점을 찾아다니는 것도 좋아합니다. 그래서 여행을 준비할 때 어디를 갈지 찾는 데 시간을 꽤 많이 쓰는 편입니다. 그런데 여행지가 바뀌어도 준비하면서 불편한 부분은 비슷하게 반복됐습니다.</a:t>
-            </a:r>
-          </a:p>
-          <a:p>
-            <a:pPr>
-              <a:buNone/>
-            </a:pPr>
-            <a:r>
-              <a:t/>
-            </a:r>
-          </a:p>
-          <a:p>
-            <a:pPr>
-              <a:buNone/>
-            </a:pPr>
-            <a:r>
-              <a:t>식당을 찾고, 숙소에서 얼마나 먼지 보고, 이미 예약한 시간과 맞춰 보는 과정이었습니다. 그때마다 여러 앱을 오가다 보니까, 제가 쓰고 싶은 기능을 한곳에 모아 보면 어떨까 생각했습니다.</a:t>
-            </a:r>
-          </a:p>
-          <a:p>
-            <a:pPr>
-              <a:buNone/>
-            </a:pPr>
-            <a:r>
-              <a:t/>
-            </a:r>
-          </a:p>
-          <a:p>
-            <a:pPr>
-              <a:buNone/>
-            </a:pPr>
-            <a:r>
-              <a:t>그 생각에서 시작한 서비스가 고잉입니다. 오늘은 어떤 문제를 해결하고 싶었고, 그걸 어떻게 만들었는지 말씀드리겠습니다.</a:t>
-            </a:r>
-          </a:p>
-        </p:txBody>
-      </p:sp>
-    </p:spTree>
-  </p:cSld>
-  <p:clrMapOvr>
-    <a:masterClrMapping/>
-  </p:clrMapOvr>
-</p:notes>
+<ns0:notes xmlns:ns0="http://schemas.openxmlformats.org/presentationml/2006/main" xmlns:ns1="http://schemas.openxmlformats.org/drawingml/2006/main" showMasterSp="1" showMasterPhAnim="1">
+  <ns0:cSld>
+    <ns0:spTree>
+      <ns0:nvGrpSpPr>
+        <ns0:cNvPr id="1" name=""/>
+        <ns0:cNvGrpSpPr/>
+        <ns0:nvPr/>
+      </ns0:nvGrpSpPr>
+      <ns0:grpSpPr>
+        <ns1:xfrm>
+          <ns1:off x="0" y="0"/>
+          <ns1:ext cx="0" cy="0"/>
+          <ns1:chOff x="0" y="0"/>
+          <ns1:chExt cx="0" cy="0"/>
+        </ns1:xfrm>
+      </ns0:grpSpPr>
+      <ns0:sp>
+        <ns0:nvSpPr>
+          <ns0:cNvPr id="71" name="Shape 71"/>
+          <ns0:cNvSpPr/>
+          <ns0:nvPr>
+            <ns0:ph type="sldImg"/>
+          </ns0:nvPr>
+        </ns0:nvSpPr>
+        <ns0:spPr>
+          <ns1:prstGeom prst="rect">
+            <ns1:avLst/>
+          </ns1:prstGeom>
+        </ns0:spPr>
+        <ns0:txBody>
+          <ns1:bodyPr/>
+          <ns1:lstStyle/>
+          <ns1:p>
+            <ns1:pPr/>
+          </ns1:p>
+        </ns0:txBody>
+      </ns0:sp>
+      <ns0:sp>
+        <ns0:nvSpPr>
+          <ns0:cNvPr id="72" name="Shape 72"/>
+          <ns0:cNvSpPr/>
+          <ns0:nvPr>
+            <ns0:ph type="body" sz="quarter" idx="1"/>
+          </ns0:nvPr>
+        </ns0:nvSpPr>
+        <ns0:spPr>
+          <ns1:prstGeom prst="rect">
+            <ns1:avLst/>
+          </ns1:prstGeom>
+        </ns0:spPr>
+        <ns0:txBody>
+          <ns1:bodyPr/>
+          <ns1:lstStyle/>
+          <ns1:p>
+            <ns1:pPr>
+              <ns1:buNone/>
+            </ns1:pPr>
+            <ns1:r>
+              <ns1:t/>
+            </ns1:r>
+          </ns1:p>
+          <ns1:p>
+            <ns1:pPr>
+              <ns1:buNone/>
+            </ns1:pPr>
+            <ns1:r>
+              <ns1:t/>
+            </ns1:r>
+          </ns1:p>
+          <ns1:p>
+            <ns1:pPr>
+              <ns1:buNone/>
+            </ns1:pPr>
+            <ns1:r>
+              <ns1:t/>
+            </ns1:r>
+          </ns1:p>
+          <ns1:p>
+            <ns1:pPr>
+              <ns1:buNone/>
+            </ns1:pPr>
+            <ns1:r>
+              <ns1:t/>
+            </ns1:r>
+          </ns1:p>
+          <ns1:p>
+            <ns1:pPr>
+              <ns1:buNone/>
+            </ns1:pPr>
+            <ns1:r>
+              <ns1:t/>
+            </ns1:r>
+          </ns1:p>
+          <ns1:p>
+            <ns1:pPr>
+              <ns1:buNone/>
+            </ns1:pPr>
+            <ns1:r>
+              <ns1:t/>
+            </ns1:r>
+          </ns1:p>
+          <ns1:p>
+            <ns1:pPr>
+              <ns1:buNone/>
+            </ns1:pPr>
+            <ns1:r>
+              <ns1:t/>
+            </ns1:r>
+          </ns1:p>
+          <ns1:p>
+            <ns1:pPr>
+              <ns1:buNone/>
+            </ns1:pPr>
+            <ns1:r>
+              <ns1:t/>
+            </ns1:r>
+          </ns1:p>
+          <ns1:p>
+            <ns1:pPr>
+              <ns1:buNone/>
+            </ns1:pPr>
+            <ns1:r>
+              <ns1:t/>
+            </ns1:r>
+          </ns1:p>
+        </ns0:txBody>
+      </ns0:sp>
+    </ns0:spTree>
+  </ns0:cSld>
+  <ns0:clrMapOvr>
+    <ns1:masterClrMapping/>
+  </ns0:clrMapOvr>
+</ns0:notes>
 </file>
 
 <file path=ppt/notesSlides/notesSlide10.xml><?xml version="1.0" encoding="utf-8"?>
-<p:notes xmlns:a="http://schemas.openxmlformats.org/drawingml/2006/main" xmlns:r="http://schemas.openxmlformats.org/officeDocument/2006/relationships" xmlns:p="http://schemas.openxmlformats.org/presentationml/2006/main" xmlns:m="http://schemas.openxmlformats.org/officeDocument/2006/math" xmlns:a14="http://schemas.microsoft.com/office/drawing/2010/main" showMasterSp="1" showMasterPhAnim="1">
-  <p:cSld>
-    <p:spTree>
-      <p:nvGrpSpPr>
-        <p:cNvPr id="1" name=""/>
-        <p:cNvGrpSpPr/>
-        <p:nvPr/>
-      </p:nvGrpSpPr>
-      <p:grpSpPr>
-        <a:xfrm>
-          <a:off x="0" y="0"/>
-          <a:ext cx="0" cy="0"/>
-          <a:chOff x="0" y="0"/>
-          <a:chExt cx="0" cy="0"/>
-        </a:xfrm>
-      </p:grpSpPr>
-      <p:sp>
-        <p:nvSpPr>
-          <p:cNvPr id="71" name="Shape 71"/>
-          <p:cNvSpPr/>
-          <p:nvPr>
-            <p:ph type="sldImg"/>
-          </p:nvPr>
-        </p:nvSpPr>
-        <p:spPr>
-          <a:prstGeom prst="rect">
-            <a:avLst/>
-          </a:prstGeom>
-        </p:spPr>
-        <p:txBody>
-          <a:bodyPr/>
-          <a:lstStyle/>
-          <a:p>
-            <a:pPr/>
-          </a:p>
-        </p:txBody>
-      </p:sp>
-      <p:sp>
-        <p:nvSpPr>
-          <p:cNvPr id="72" name="Shape 72"/>
-          <p:cNvSpPr/>
-          <p:nvPr>
-            <p:ph type="body" sz="quarter" idx="1"/>
-          </p:nvPr>
-        </p:nvSpPr>
-        <p:spPr>
-          <a:prstGeom prst="rect">
-            <a:avLst/>
-          </a:prstGeom>
-        </p:spPr>
-        <p:txBody>
-          <a:bodyPr/>
-          <a:lstStyle/>
-          <a:p>
-            <a:pPr>
-              <a:buNone/>
-            </a:pPr>
-            <a:r>
-              <a:t>[10장 · 약 55초]</a:t>
-            </a:r>
-          </a:p>
-          <a:p>
-            <a:pPr>
-              <a:buNone/>
-            </a:pPr>
-            <a:r>
-              <a:t/>
-            </a:r>
-          </a:p>
-          <a:p>
-            <a:pPr>
-              <a:buNone/>
-            </a:pPr>
-            <a:r>
-              <a:t>추천 순위는 현재 hybrid_v5라는 모델로 계산합니다. 장소의 정보와 사용자의 여행 조건을 조합하는 방식입니다.</a:t>
-            </a:r>
-          </a:p>
-          <a:p>
-            <a:pPr>
-              <a:buNone/>
-            </a:pPr>
-            <a:r>
-              <a:t/>
-            </a:r>
-          </a:p>
-          <a:p>
-            <a:pPr>
-              <a:buNone/>
-            </a:pPr>
-            <a:r>
-              <a:t>먼저 취향을 비교합니다. 사용자가 초밥을 좋아한다고 했을 때, 장소 자료에 초밥이나 스시, 일본어로 된 음식 이름이 있어도 서로 연결할 수 있게 했습니다. 기술적으로는 TF-IDF와 코사인 유사도를 사용해서 취향과 장소 태그가 얼마나 가까운지 계산합니다.</a:t>
-            </a:r>
-          </a:p>
-          <a:p>
-            <a:pPr>
-              <a:buNone/>
-            </a:pPr>
-            <a:r>
-              <a:t/>
-            </a:r>
-          </a:p>
-          <a:p>
-            <a:pPr>
-              <a:buNone/>
-            </a:pPr>
-            <a:r>
-              <a:t>평점도 함께 보지만, 평가가 아주 적은 곳의 높은 점수를 그대로 믿지는 않도록 했습니다. 평가 수에 따라 평균 쪽으로 보정합니다. 거리는 확인된 숙소나 출발점을 기준으로 계산하고, 기준이 무엇인지 화면에 표시합니다.</a:t>
-            </a:r>
-          </a:p>
-          <a:p>
-            <a:pPr>
-              <a:buNone/>
-            </a:pPr>
-            <a:r>
-              <a:t/>
-            </a:r>
-          </a:p>
-          <a:p>
-            <a:pPr>
-              <a:buNone/>
-            </a:pPr>
-            <a:r>
-              <a:t>그리고 점수를 매기기 전에 폐업이나 확인된 인원 제한처럼 방문에 중요한 조건부터 확인합니다. 좋은 평점이 이런 문제를 덮어 버리지 않도록 한 겁니다.</a:t>
-            </a:r>
-          </a:p>
-          <a:p>
-            <a:pPr>
-              <a:buNone/>
-            </a:pPr>
-            <a:r>
-              <a:t/>
-            </a:r>
-          </a:p>
-          <a:p>
-            <a:pPr>
-              <a:buNone/>
-            </a:pPr>
-            <a:r>
-              <a:t>아직 사용자 행동을 학습한 모델은 아닙니다. 지금은 계산 과정을 설명할 수 있게 만들었고, 실제로 어떤 추천을 선택하는지는 앞으로 따로 평가하려고 합니다.</a:t>
-            </a:r>
-          </a:p>
-        </p:txBody>
-      </p:sp>
-    </p:spTree>
-  </p:cSld>
-  <p:clrMapOvr>
-    <a:masterClrMapping/>
-  </p:clrMapOvr>
-</p:notes>
+<ns0:notes xmlns:ns0="http://schemas.openxmlformats.org/presentationml/2006/main" xmlns:ns1="http://schemas.openxmlformats.org/drawingml/2006/main" showMasterSp="1" showMasterPhAnim="1">
+  <ns0:cSld>
+    <ns0:spTree>
+      <ns0:nvGrpSpPr>
+        <ns0:cNvPr id="1" name=""/>
+        <ns0:cNvGrpSpPr/>
+        <ns0:nvPr/>
+      </ns0:nvGrpSpPr>
+      <ns0:grpSpPr>
+        <ns1:xfrm>
+          <ns1:off x="0" y="0"/>
+          <ns1:ext cx="0" cy="0"/>
+          <ns1:chOff x="0" y="0"/>
+          <ns1:chExt cx="0" cy="0"/>
+        </ns1:xfrm>
+      </ns0:grpSpPr>
+      <ns0:sp>
+        <ns0:nvSpPr>
+          <ns0:cNvPr id="71" name="Shape 71"/>
+          <ns0:cNvSpPr/>
+          <ns0:nvPr>
+            <ns0:ph type="sldImg"/>
+          </ns0:nvPr>
+        </ns0:nvSpPr>
+        <ns0:spPr>
+          <ns1:prstGeom prst="rect">
+            <ns1:avLst/>
+          </ns1:prstGeom>
+        </ns0:spPr>
+        <ns0:txBody>
+          <ns1:bodyPr/>
+          <ns1:lstStyle/>
+          <ns1:p>
+            <ns1:pPr/>
+          </ns1:p>
+        </ns0:txBody>
+      </ns0:sp>
+      <ns0:sp>
+        <ns0:nvSpPr>
+          <ns0:cNvPr id="72" name="Shape 72"/>
+          <ns0:cNvSpPr/>
+          <ns0:nvPr>
+            <ns0:ph type="body" sz="quarter" idx="1"/>
+          </ns0:nvPr>
+        </ns0:nvSpPr>
+        <ns0:spPr>
+          <ns1:prstGeom prst="rect">
+            <ns1:avLst/>
+          </ns1:prstGeom>
+        </ns0:spPr>
+        <ns0:txBody>
+          <ns1:bodyPr/>
+          <ns1:lstStyle/>
+          <ns1:p>
+            <ns1:pPr>
+              <ns1:buNone/>
+            </ns1:pPr>
+            <ns1:r>
+              <ns1:t/>
+            </ns1:r>
+          </ns1:p>
+          <ns1:p>
+            <ns1:pPr>
+              <ns1:buNone/>
+            </ns1:pPr>
+            <ns1:r>
+              <ns1:t/>
+            </ns1:r>
+          </ns1:p>
+          <ns1:p>
+            <ns1:pPr>
+              <ns1:buNone/>
+            </ns1:pPr>
+            <ns1:r>
+              <ns1:t/>
+            </ns1:r>
+          </ns1:p>
+          <ns1:p>
+            <ns1:pPr>
+              <ns1:buNone/>
+            </ns1:pPr>
+            <ns1:r>
+              <ns1:t/>
+            </ns1:r>
+          </ns1:p>
+          <ns1:p>
+            <ns1:pPr>
+              <ns1:buNone/>
+            </ns1:pPr>
+            <ns1:r>
+              <ns1:t/>
+            </ns1:r>
+          </ns1:p>
+          <ns1:p>
+            <ns1:pPr>
+              <ns1:buNone/>
+            </ns1:pPr>
+            <ns1:r>
+              <ns1:t/>
+            </ns1:r>
+          </ns1:p>
+          <ns1:p>
+            <ns1:pPr>
+              <ns1:buNone/>
+            </ns1:pPr>
+            <ns1:r>
+              <ns1:t/>
+            </ns1:r>
+          </ns1:p>
+          <ns1:p>
+            <ns1:pPr>
+              <ns1:buNone/>
+            </ns1:pPr>
+            <ns1:r>
+              <ns1:t/>
+            </ns1:r>
+          </ns1:p>
+          <ns1:p>
+            <ns1:pPr>
+              <ns1:buNone/>
+            </ns1:pPr>
+            <ns1:r>
+              <ns1:t/>
+            </ns1:r>
+          </ns1:p>
+          <ns1:p>
+            <ns1:pPr>
+              <ns1:buNone/>
+            </ns1:pPr>
+            <ns1:r>
+              <ns1:t/>
+            </ns1:r>
+          </ns1:p>
+          <ns1:p>
+            <ns1:pPr>
+              <ns1:buNone/>
+            </ns1:pPr>
+            <ns1:r>
+              <ns1:t/>
+            </ns1:r>
+          </ns1:p>
+        </ns0:txBody>
+      </ns0:sp>
+    </ns0:spTree>
+  </ns0:cSld>
+  <ns0:clrMapOvr>
+    <ns1:masterClrMapping/>
+  </ns0:clrMapOvr>
+</ns0:notes>
 </file>
 
 <file path=ppt/notesSlides/notesSlide11.xml><?xml version="1.0" encoding="utf-8"?>
-<p:notes xmlns:a="http://schemas.openxmlformats.org/drawingml/2006/main" xmlns:r="http://schemas.openxmlformats.org/officeDocument/2006/relationships" xmlns:p="http://schemas.openxmlformats.org/presentationml/2006/main" xmlns:m="http://schemas.openxmlformats.org/officeDocument/2006/math" xmlns:a14="http://schemas.microsoft.com/office/drawing/2010/main" showMasterSp="1" showMasterPhAnim="1">
-  <p:cSld>
-    <p:spTree>
-      <p:nvGrpSpPr>
-        <p:cNvPr id="1" name=""/>
-        <p:cNvGrpSpPr/>
-        <p:nvPr/>
-      </p:nvGrpSpPr>
-      <p:grpSpPr>
-        <a:xfrm>
-          <a:off x="0" y="0"/>
-          <a:ext cx="0" cy="0"/>
-          <a:chOff x="0" y="0"/>
-          <a:chExt cx="0" cy="0"/>
-        </a:xfrm>
-      </p:grpSpPr>
-      <p:sp>
-        <p:nvSpPr>
-          <p:cNvPr id="71" name="Shape 71"/>
-          <p:cNvSpPr/>
-          <p:nvPr>
-            <p:ph type="sldImg"/>
-          </p:nvPr>
-        </p:nvSpPr>
-        <p:spPr>
-          <a:prstGeom prst="rect">
-            <a:avLst/>
-          </a:prstGeom>
-        </p:spPr>
-        <p:txBody>
-          <a:bodyPr/>
-          <a:lstStyle/>
-          <a:p>
-            <a:pPr/>
-          </a:p>
-        </p:txBody>
-      </p:sp>
-      <p:sp>
-        <p:nvSpPr>
-          <p:cNvPr id="72" name="Shape 72"/>
-          <p:cNvSpPr/>
-          <p:nvPr>
-            <p:ph type="body" sz="quarter" idx="1"/>
-          </p:nvPr>
-        </p:nvSpPr>
-        <p:spPr>
-          <a:prstGeom prst="rect">
-            <a:avLst/>
-          </a:prstGeom>
-        </p:spPr>
-        <p:txBody>
-          <a:bodyPr/>
-          <a:lstStyle/>
-          <a:p>
-            <a:pPr>
-              <a:buNone/>
-            </a:pPr>
-            <a:r>
-              <a:t>[11장 · 약 45초]</a:t>
-            </a:r>
-          </a:p>
-          <a:p>
-            <a:pPr>
-              <a:buNone/>
-            </a:pPr>
-            <a:r>
-              <a:t/>
-            </a:r>
-          </a:p>
-          <a:p>
-            <a:pPr>
-              <a:buNone/>
-            </a:pPr>
-            <a:r>
-              <a:t>만들면서 가장 많이 바뀐 건 화면의 사용 흐름이었습니다. 처음에는 기능을 추가하면 더 편해질 거라고 생각했는데, 입력 항목과 메뉴가 늘어나면서 오히려 어떻게 시작해야 할지 어려워졌습니다.</a:t>
-            </a:r>
-          </a:p>
-          <a:p>
-            <a:pPr>
-              <a:buNone/>
-            </a:pPr>
-            <a:r>
-              <a:t/>
-            </a:r>
-          </a:p>
-          <a:p>
-            <a:pPr>
-              <a:buNone/>
-            </a:pPr>
-            <a:r>
-              <a:t>그래서 도시와 날짜처럼 이미 아는 정보는 다시 묻지 않게 했습니다. 자주 쓰는 추천과 AI 질문은 메인에 꺼내고, 세부 조건은 필요할 때만 바꿀 수 있도록 정리했습니다. 장소 카드도 긴 안내보다 상세 보기와 저장을 먼저 찾을 수 있게 했고요.</a:t>
-            </a:r>
-          </a:p>
-          <a:p>
-            <a:pPr>
-              <a:buNone/>
-            </a:pPr>
-            <a:r>
-              <a:t/>
-            </a:r>
-          </a:p>
-          <a:p>
-            <a:pPr>
-              <a:buNone/>
-            </a:pPr>
-            <a:r>
-              <a:t>추천을 기다리는 중에는 지금 처리하고 있다는 걸 보여주고, 다른 화면에 갔다 와도 이어서 확인할 수 있게 했습니다. 오류가 났을 때 입력한 내용이 사라지지 않는지도 살펴봤습니다.</a:t>
-            </a:r>
-          </a:p>
-          <a:p>
-            <a:pPr>
-              <a:buNone/>
-            </a:pPr>
-            <a:r>
-              <a:t/>
-            </a:r>
-          </a:p>
-          <a:p>
-            <a:pPr>
-              <a:buNone/>
-            </a:pPr>
-            <a:r>
-              <a:t>이 과정을 통해 기능이 있다는 것과 사용자가 편하게 쓸 수 있다는 건 다르다는 걸 느꼈습니다. 지금도 새로운 기능만큼 기존 기능을 덜 번거롭게 쓰는 데 신경 쓰고 있습니다.</a:t>
-            </a:r>
-          </a:p>
-        </p:txBody>
-      </p:sp>
-    </p:spTree>
-  </p:cSld>
-  <p:clrMapOvr>
-    <a:masterClrMapping/>
-  </p:clrMapOvr>
-</p:notes>
+<ns0:notes xmlns:ns0="http://schemas.openxmlformats.org/presentationml/2006/main" xmlns:ns1="http://schemas.openxmlformats.org/drawingml/2006/main" showMasterSp="1" showMasterPhAnim="1">
+  <ns0:cSld>
+    <ns0:spTree>
+      <ns0:nvGrpSpPr>
+        <ns0:cNvPr id="1" name=""/>
+        <ns0:cNvGrpSpPr/>
+        <ns0:nvPr/>
+      </ns0:nvGrpSpPr>
+      <ns0:grpSpPr>
+        <ns1:xfrm>
+          <ns1:off x="0" y="0"/>
+          <ns1:ext cx="0" cy="0"/>
+          <ns1:chOff x="0" y="0"/>
+          <ns1:chExt cx="0" cy="0"/>
+        </ns1:xfrm>
+      </ns0:grpSpPr>
+      <ns0:sp>
+        <ns0:nvSpPr>
+          <ns0:cNvPr id="71" name="Shape 71"/>
+          <ns0:cNvSpPr/>
+          <ns0:nvPr>
+            <ns0:ph type="sldImg"/>
+          </ns0:nvPr>
+        </ns0:nvSpPr>
+        <ns0:spPr>
+          <ns1:prstGeom prst="rect">
+            <ns1:avLst/>
+          </ns1:prstGeom>
+        </ns0:spPr>
+        <ns0:txBody>
+          <ns1:bodyPr/>
+          <ns1:lstStyle/>
+          <ns1:p>
+            <ns1:pPr/>
+          </ns1:p>
+        </ns0:txBody>
+      </ns0:sp>
+      <ns0:sp>
+        <ns0:nvSpPr>
+          <ns0:cNvPr id="72" name="Shape 72"/>
+          <ns0:cNvSpPr/>
+          <ns0:nvPr>
+            <ns0:ph type="body" sz="quarter" idx="1"/>
+          </ns0:nvPr>
+        </ns0:nvSpPr>
+        <ns0:spPr>
+          <ns1:prstGeom prst="rect">
+            <ns1:avLst/>
+          </ns1:prstGeom>
+        </ns0:spPr>
+        <ns0:txBody>
+          <ns1:bodyPr/>
+          <ns1:lstStyle/>
+          <ns1:p>
+            <ns1:pPr>
+              <ns1:buNone/>
+            </ns1:pPr>
+            <ns1:r>
+              <ns1:t/>
+            </ns1:r>
+          </ns1:p>
+          <ns1:p>
+            <ns1:pPr>
+              <ns1:buNone/>
+            </ns1:pPr>
+            <ns1:r>
+              <ns1:t/>
+            </ns1:r>
+          </ns1:p>
+          <ns1:p>
+            <ns1:pPr>
+              <ns1:buNone/>
+            </ns1:pPr>
+            <ns1:r>
+              <ns1:t/>
+            </ns1:r>
+          </ns1:p>
+          <ns1:p>
+            <ns1:pPr>
+              <ns1:buNone/>
+            </ns1:pPr>
+            <ns1:r>
+              <ns1:t/>
+            </ns1:r>
+          </ns1:p>
+          <ns1:p>
+            <ns1:pPr>
+              <ns1:buNone/>
+            </ns1:pPr>
+            <ns1:r>
+              <ns1:t/>
+            </ns1:r>
+          </ns1:p>
+          <ns1:p>
+            <ns1:pPr>
+              <ns1:buNone/>
+            </ns1:pPr>
+            <ns1:r>
+              <ns1:t/>
+            </ns1:r>
+          </ns1:p>
+          <ns1:p>
+            <ns1:pPr>
+              <ns1:buNone/>
+            </ns1:pPr>
+            <ns1:r>
+              <ns1:t/>
+            </ns1:r>
+          </ns1:p>
+          <ns1:p>
+            <ns1:pPr>
+              <ns1:buNone/>
+            </ns1:pPr>
+            <ns1:r>
+              <ns1:t/>
+            </ns1:r>
+          </ns1:p>
+          <ns1:p>
+            <ns1:pPr>
+              <ns1:buNone/>
+            </ns1:pPr>
+            <ns1:r>
+              <ns1:t/>
+            </ns1:r>
+          </ns1:p>
+        </ns0:txBody>
+      </ns0:sp>
+    </ns0:spTree>
+  </ns0:cSld>
+  <ns0:clrMapOvr>
+    <ns1:masterClrMapping/>
+  </ns0:clrMapOvr>
+</ns0:notes>
 </file>
 
 <file path=ppt/notesSlides/notesSlide12.xml><?xml version="1.0" encoding="utf-8"?>
-<p:notes xmlns:a="http://schemas.openxmlformats.org/drawingml/2006/main" xmlns:r="http://schemas.openxmlformats.org/officeDocument/2006/relationships" xmlns:p="http://schemas.openxmlformats.org/presentationml/2006/main" xmlns:m="http://schemas.openxmlformats.org/officeDocument/2006/math" xmlns:a14="http://schemas.microsoft.com/office/drawing/2010/main" showMasterSp="1" showMasterPhAnim="1">
-  <p:cSld>
-    <p:spTree>
-      <p:nvGrpSpPr>
-        <p:cNvPr id="1" name=""/>
-        <p:cNvGrpSpPr/>
-        <p:nvPr/>
-      </p:nvGrpSpPr>
-      <p:grpSpPr>
-        <a:xfrm>
-          <a:off x="0" y="0"/>
-          <a:ext cx="0" cy="0"/>
-          <a:chOff x="0" y="0"/>
-          <a:chExt cx="0" cy="0"/>
-        </a:xfrm>
-      </p:grpSpPr>
-      <p:sp>
-        <p:nvSpPr>
-          <p:cNvPr id="71" name="Shape 71"/>
-          <p:cNvSpPr/>
-          <p:nvPr>
-            <p:ph type="sldImg"/>
-          </p:nvPr>
-        </p:nvSpPr>
-        <p:spPr>
-          <a:prstGeom prst="rect">
-            <a:avLst/>
-          </a:prstGeom>
-        </p:spPr>
-        <p:txBody>
-          <a:bodyPr/>
-          <a:lstStyle/>
-          <a:p>
-            <a:pPr/>
-          </a:p>
-        </p:txBody>
-      </p:sp>
-      <p:sp>
-        <p:nvSpPr>
-          <p:cNvPr id="72" name="Shape 72"/>
-          <p:cNvSpPr/>
-          <p:nvPr>
-            <p:ph type="body" sz="quarter" idx="1"/>
-          </p:nvPr>
-        </p:nvSpPr>
-        <p:spPr>
-          <a:prstGeom prst="rect">
-            <a:avLst/>
-          </a:prstGeom>
-        </p:spPr>
-        <p:txBody>
-          <a:bodyPr/>
-          <a:lstStyle/>
-          <a:p>
-            <a:pPr>
-              <a:buNone/>
-            </a:pPr>
-            <a:r>
-              <a:t>[12장 · 약 40초]</a:t>
-            </a:r>
-          </a:p>
-          <a:p>
-            <a:pPr>
-              <a:buNone/>
-            </a:pPr>
-            <a:r>
-              <a:t/>
-            </a:r>
-          </a:p>
-          <a:p>
-            <a:pPr>
-              <a:buNone/>
-            </a:pPr>
-            <a:r>
-              <a:t>앞으로 가장 먼저 보완하고 싶은 건 장소 데이터입니다. 사진과 영업 정보가 부족한 곳을 채워서 실제로 장소를 고를 때 도움이 되게 만들고 싶습니다.</a:t>
-            </a:r>
-          </a:p>
-          <a:p>
-            <a:pPr>
-              <a:buNone/>
-            </a:pPr>
-            <a:r>
-              <a:t/>
-            </a:r>
-          </a:p>
-          <a:p>
-            <a:pPr>
-              <a:buNone/>
-            </a:pPr>
-            <a:r>
-              <a:t>그다음에는 현지어 리뷰의 품질을 확인해서 이 기능을 사용할 수 있는 도시부터 넓혀 갈 계획입니다. 도시 입력은 백 개를 지원하지만, 모든 도시에 같은 수준의 자료가 준비된 것은 아닙니다.</a:t>
-            </a:r>
-          </a:p>
-          <a:p>
-            <a:pPr>
-              <a:buNone/>
-            </a:pPr>
-            <a:r>
-              <a:t/>
-            </a:r>
-          </a:p>
-          <a:p>
-            <a:pPr>
-              <a:buNone/>
-            </a:pPr>
-            <a:r>
-              <a:t>추천 결과도 제가 만든 예시만으로 평가하지 않고, 다른 사람이 어떤 곳을 선택하는지와 실제 방문 경험을 보면서 개선하려고 합니다.</a:t>
-            </a:r>
-          </a:p>
-          <a:p>
-            <a:pPr>
-              <a:buNone/>
-            </a:pPr>
-            <a:r>
-              <a:t/>
-            </a:r>
-          </a:p>
-          <a:p>
-            <a:pPr>
-              <a:buNone/>
-            </a:pPr>
-            <a:r>
-              <a:t>고잉은 제가 좋아하는 여행과 음식점 탐색을 조금 더 편하게 하고 싶어서 시작한 프로젝트입니다. 앞으로도 직접 사용하면서, 준비할 때 반복하던 일을 줄여 주는 서비스로 만들어 가고 싶습니다. 감사합니다.</a:t>
-            </a:r>
-          </a:p>
-        </p:txBody>
-      </p:sp>
-    </p:spTree>
-  </p:cSld>
-  <p:clrMapOvr>
-    <a:masterClrMapping/>
-  </p:clrMapOvr>
-</p:notes>
+<ns0:notes xmlns:ns0="http://schemas.openxmlformats.org/presentationml/2006/main" xmlns:ns1="http://schemas.openxmlformats.org/drawingml/2006/main" showMasterSp="1" showMasterPhAnim="1">
+  <ns0:cSld>
+    <ns0:spTree>
+      <ns0:nvGrpSpPr>
+        <ns0:cNvPr id="1" name=""/>
+        <ns0:cNvGrpSpPr/>
+        <ns0:nvPr/>
+      </ns0:nvGrpSpPr>
+      <ns0:grpSpPr>
+        <ns1:xfrm>
+          <ns1:off x="0" y="0"/>
+          <ns1:ext cx="0" cy="0"/>
+          <ns1:chOff x="0" y="0"/>
+          <ns1:chExt cx="0" cy="0"/>
+        </ns1:xfrm>
+      </ns0:grpSpPr>
+      <ns0:sp>
+        <ns0:nvSpPr>
+          <ns0:cNvPr id="71" name="Shape 71"/>
+          <ns0:cNvSpPr/>
+          <ns0:nvPr>
+            <ns0:ph type="sldImg"/>
+          </ns0:nvPr>
+        </ns0:nvSpPr>
+        <ns0:spPr>
+          <ns1:prstGeom prst="rect">
+            <ns1:avLst/>
+          </ns1:prstGeom>
+        </ns0:spPr>
+        <ns0:txBody>
+          <ns1:bodyPr/>
+          <ns1:lstStyle/>
+          <ns1:p>
+            <ns1:pPr/>
+          </ns1:p>
+        </ns0:txBody>
+      </ns0:sp>
+      <ns0:sp>
+        <ns0:nvSpPr>
+          <ns0:cNvPr id="72" name="Shape 72"/>
+          <ns0:cNvSpPr/>
+          <ns0:nvPr>
+            <ns0:ph type="body" sz="quarter" idx="1"/>
+          </ns0:nvPr>
+        </ns0:nvSpPr>
+        <ns0:spPr>
+          <ns1:prstGeom prst="rect">
+            <ns1:avLst/>
+          </ns1:prstGeom>
+        </ns0:spPr>
+        <ns0:txBody>
+          <ns1:bodyPr/>
+          <ns1:lstStyle/>
+          <ns1:p>
+            <ns1:pPr>
+              <ns1:buNone/>
+            </ns1:pPr>
+            <ns1:r>
+              <ns1:t/>
+            </ns1:r>
+          </ns1:p>
+          <ns1:p>
+            <ns1:pPr>
+              <ns1:buNone/>
+            </ns1:pPr>
+            <ns1:r>
+              <ns1:t/>
+            </ns1:r>
+          </ns1:p>
+          <ns1:p>
+            <ns1:pPr>
+              <ns1:buNone/>
+            </ns1:pPr>
+            <ns1:r>
+              <ns1:t/>
+            </ns1:r>
+          </ns1:p>
+          <ns1:p>
+            <ns1:pPr>
+              <ns1:buNone/>
+            </ns1:pPr>
+            <ns1:r>
+              <ns1:t/>
+            </ns1:r>
+          </ns1:p>
+          <ns1:p>
+            <ns1:pPr>
+              <ns1:buNone/>
+            </ns1:pPr>
+            <ns1:r>
+              <ns1:t/>
+            </ns1:r>
+          </ns1:p>
+          <ns1:p>
+            <ns1:pPr>
+              <ns1:buNone/>
+            </ns1:pPr>
+            <ns1:r>
+              <ns1:t/>
+            </ns1:r>
+          </ns1:p>
+          <ns1:p>
+            <ns1:pPr>
+              <ns1:buNone/>
+            </ns1:pPr>
+            <ns1:r>
+              <ns1:t/>
+            </ns1:r>
+          </ns1:p>
+          <ns1:p>
+            <ns1:pPr>
+              <ns1:buNone/>
+            </ns1:pPr>
+            <ns1:r>
+              <ns1:t/>
+            </ns1:r>
+          </ns1:p>
+          <ns1:p>
+            <ns1:pPr>
+              <ns1:buNone/>
+            </ns1:pPr>
+            <ns1:r>
+              <ns1:t/>
+            </ns1:r>
+          </ns1:p>
+        </ns0:txBody>
+      </ns0:sp>
+    </ns0:spTree>
+  </ns0:cSld>
+  <ns0:clrMapOvr>
+    <ns1:masterClrMapping/>
+  </ns0:clrMapOvr>
+</ns0:notes>
 </file>
 
 <file path=ppt/notesSlides/notesSlide2.xml><?xml version="1.0" encoding="utf-8"?>
-<p:notes xmlns:a="http://schemas.openxmlformats.org/drawingml/2006/main" xmlns:r="http://schemas.openxmlformats.org/officeDocument/2006/relationships" xmlns:p="http://schemas.openxmlformats.org/presentationml/2006/main" xmlns:m="http://schemas.openxmlformats.org/officeDocument/2006/math" xmlns:a14="http://schemas.microsoft.com/office/drawing/2010/main" showMasterSp="1" showMasterPhAnim="1">
-  <p:cSld>
-    <p:spTree>
-      <p:nvGrpSpPr>
-        <p:cNvPr id="1" name=""/>
-        <p:cNvGrpSpPr/>
-        <p:nvPr/>
-      </p:nvGrpSpPr>
-      <p:grpSpPr>
-        <a:xfrm>
-          <a:off x="0" y="0"/>
-          <a:ext cx="0" cy="0"/>
-          <a:chOff x="0" y="0"/>
-          <a:chExt cx="0" cy="0"/>
-        </a:xfrm>
-      </p:grpSpPr>
-      <p:sp>
-        <p:nvSpPr>
-          <p:cNvPr id="71" name="Shape 71"/>
-          <p:cNvSpPr/>
-          <p:nvPr>
-            <p:ph type="sldImg"/>
-          </p:nvPr>
-        </p:nvSpPr>
-        <p:spPr>
-          <a:prstGeom prst="rect">
-            <a:avLst/>
-          </a:prstGeom>
-        </p:spPr>
-        <p:txBody>
-          <a:bodyPr/>
-          <a:lstStyle/>
-          <a:p>
-            <a:pPr/>
-          </a:p>
-        </p:txBody>
-      </p:sp>
-      <p:sp>
-        <p:nvSpPr>
-          <p:cNvPr id="72" name="Shape 72"/>
-          <p:cNvSpPr/>
-          <p:nvPr>
-            <p:ph type="body" sz="quarter" idx="1"/>
-          </p:nvPr>
-        </p:nvSpPr>
-        <p:spPr>
-          <a:prstGeom prst="rect">
-            <a:avLst/>
-          </a:prstGeom>
-        </p:spPr>
-        <p:txBody>
-          <a:bodyPr/>
-          <a:lstStyle/>
-          <a:p>
-            <a:pPr>
-              <a:buNone/>
-            </a:pPr>
-            <a:r>
-              <a:t>[2장 · 약 55초]</a:t>
-            </a:r>
-          </a:p>
-          <a:p>
-            <a:pPr>
-              <a:buNone/>
-            </a:pPr>
-            <a:r>
-              <a:t/>
-            </a:r>
-          </a:p>
-          <a:p>
-            <a:pPr>
-              <a:buNone/>
-            </a:pPr>
-            <a:r>
-              <a:t>여행을 준비하는 상황을 떠올려 보면 좋을 것 같습니다. 예를 들어 도쿄에 간다고 하면, 저는 먼저 가보고 싶은 식당부터 찾아봅니다. 괜찮아 보이는 곳이 있으면 리뷰를 읽고 지도에 저장합니다.</a:t>
-            </a:r>
-          </a:p>
-          <a:p>
-            <a:pPr>
-              <a:buNone/>
-            </a:pPr>
-            <a:r>
-              <a:t/>
-            </a:r>
-          </a:p>
-          <a:p>
-            <a:pPr>
-              <a:buNone/>
-            </a:pPr>
-            <a:r>
-              <a:t>그런데 저장했다고 준비가 끝나는 건 아니었습니다. 숙소에서 너무 멀지는 않은지, 제가 가는 날에 문을 여는지, 예약이 필요한지를 다시 찾아야 했습니다. 후보가 몇 개만 늘어나도 어느 곳이 더 괜찮았는지 다시 비교하게 됐고요.</a:t>
-            </a:r>
-          </a:p>
-          <a:p>
-            <a:pPr>
-              <a:buNone/>
-            </a:pPr>
-            <a:r>
-              <a:t/>
-            </a:r>
-          </a:p>
-          <a:p>
-            <a:pPr>
-              <a:buNone/>
-            </a:pPr>
-            <a:r>
-              <a:t>예약한 뒤에도 비슷했습니다. 호텔 체크인 시간은 메일함에 있고, 가보고 싶은 곳은 지도에 있고, 일정은 따로 적어 두었습니다. 결국 정보를 찾아 놓고도 여행 당일에 쓸 수 있는 형태로 다시 정리해야 했습니다.</a:t>
-            </a:r>
-          </a:p>
-          <a:p>
-            <a:pPr>
-              <a:buNone/>
-            </a:pPr>
-            <a:r>
-              <a:t/>
-            </a:r>
-          </a:p>
-          <a:p>
-            <a:pPr>
-              <a:buNone/>
-            </a:pPr>
-            <a:r>
-              <a:t>제가 줄이고 싶었던 건 바로 이 반복이었습니다. 한 번 입력하거나 확인한 내용을 다음 단계에서도 계속 쓸 수 있으면 여행 준비가 훨씬 편해질 것 같았습니다.</a:t>
-            </a:r>
-          </a:p>
-        </p:txBody>
-      </p:sp>
-    </p:spTree>
-  </p:cSld>
-  <p:clrMapOvr>
-    <a:masterClrMapping/>
-  </p:clrMapOvr>
-</p:notes>
+<ns0:notes xmlns:ns0="http://schemas.openxmlformats.org/presentationml/2006/main" xmlns:ns1="http://schemas.openxmlformats.org/drawingml/2006/main" showMasterSp="1" showMasterPhAnim="1">
+  <ns0:cSld>
+    <ns0:spTree>
+      <ns0:nvGrpSpPr>
+        <ns0:cNvPr id="1" name=""/>
+        <ns0:cNvGrpSpPr/>
+        <ns0:nvPr/>
+      </ns0:nvGrpSpPr>
+      <ns0:grpSpPr>
+        <ns1:xfrm>
+          <ns1:off x="0" y="0"/>
+          <ns1:ext cx="0" cy="0"/>
+          <ns1:chOff x="0" y="0"/>
+          <ns1:chExt cx="0" cy="0"/>
+        </ns1:xfrm>
+      </ns0:grpSpPr>
+      <ns0:sp>
+        <ns0:nvSpPr>
+          <ns0:cNvPr id="71" name="Shape 71"/>
+          <ns0:cNvSpPr/>
+          <ns0:nvPr>
+            <ns0:ph type="sldImg"/>
+          </ns0:nvPr>
+        </ns0:nvSpPr>
+        <ns0:spPr>
+          <ns1:prstGeom prst="rect">
+            <ns1:avLst/>
+          </ns1:prstGeom>
+        </ns0:spPr>
+        <ns0:txBody>
+          <ns1:bodyPr/>
+          <ns1:lstStyle/>
+          <ns1:p>
+            <ns1:pPr/>
+          </ns1:p>
+        </ns0:txBody>
+      </ns0:sp>
+      <ns0:sp>
+        <ns0:nvSpPr>
+          <ns0:cNvPr id="72" name="Shape 72"/>
+          <ns0:cNvSpPr/>
+          <ns0:nvPr>
+            <ns0:ph type="body" sz="quarter" idx="1"/>
+          </ns0:nvPr>
+        </ns0:nvSpPr>
+        <ns0:spPr>
+          <ns1:prstGeom prst="rect">
+            <ns1:avLst/>
+          </ns1:prstGeom>
+        </ns0:spPr>
+        <ns0:txBody>
+          <ns1:bodyPr/>
+          <ns1:lstStyle/>
+          <ns1:p>
+            <ns1:pPr>
+              <ns1:buNone/>
+            </ns1:pPr>
+            <ns1:r>
+              <ns1:t/>
+            </ns1:r>
+          </ns1:p>
+          <ns1:p>
+            <ns1:pPr>
+              <ns1:buNone/>
+            </ns1:pPr>
+            <ns1:r>
+              <ns1:t/>
+            </ns1:r>
+          </ns1:p>
+          <ns1:p>
+            <ns1:pPr>
+              <ns1:buNone/>
+            </ns1:pPr>
+            <ns1:r>
+              <ns1:t/>
+            </ns1:r>
+          </ns1:p>
+          <ns1:p>
+            <ns1:pPr>
+              <ns1:buNone/>
+            </ns1:pPr>
+            <ns1:r>
+              <ns1:t/>
+            </ns1:r>
+          </ns1:p>
+          <ns1:p>
+            <ns1:pPr>
+              <ns1:buNone/>
+            </ns1:pPr>
+            <ns1:r>
+              <ns1:t/>
+            </ns1:r>
+          </ns1:p>
+          <ns1:p>
+            <ns1:pPr>
+              <ns1:buNone/>
+            </ns1:pPr>
+            <ns1:r>
+              <ns1:t/>
+            </ns1:r>
+          </ns1:p>
+          <ns1:p>
+            <ns1:pPr>
+              <ns1:buNone/>
+            </ns1:pPr>
+            <ns1:r>
+              <ns1:t/>
+            </ns1:r>
+          </ns1:p>
+          <ns1:p>
+            <ns1:pPr>
+              <ns1:buNone/>
+            </ns1:pPr>
+            <ns1:r>
+              <ns1:t/>
+            </ns1:r>
+          </ns1:p>
+          <ns1:p>
+            <ns1:pPr>
+              <ns1:buNone/>
+            </ns1:pPr>
+            <ns1:r>
+              <ns1:t/>
+            </ns1:r>
+          </ns1:p>
+        </ns0:txBody>
+      </ns0:sp>
+    </ns0:spTree>
+  </ns0:cSld>
+  <ns0:clrMapOvr>
+    <ns1:masterClrMapping/>
+  </ns0:clrMapOvr>
+</ns0:notes>
 </file>
 
 <file path=ppt/notesSlides/notesSlide3.xml><?xml version="1.0" encoding="utf-8"?>
-<p:notes xmlns:a="http://schemas.openxmlformats.org/drawingml/2006/main" xmlns:r="http://schemas.openxmlformats.org/officeDocument/2006/relationships" xmlns:p="http://schemas.openxmlformats.org/presentationml/2006/main" xmlns:m="http://schemas.openxmlformats.org/officeDocument/2006/math" xmlns:a14="http://schemas.microsoft.com/office/drawing/2010/main" showMasterSp="1" showMasterPhAnim="1">
-  <p:cSld>
-    <p:spTree>
-      <p:nvGrpSpPr>
-        <p:cNvPr id="1" name=""/>
-        <p:cNvGrpSpPr/>
-        <p:nvPr/>
-      </p:nvGrpSpPr>
-      <p:grpSpPr>
-        <a:xfrm>
-          <a:off x="0" y="0"/>
-          <a:ext cx="0" cy="0"/>
-          <a:chOff x="0" y="0"/>
-          <a:chExt cx="0" cy="0"/>
-        </a:xfrm>
-      </p:grpSpPr>
-      <p:sp>
-        <p:nvSpPr>
-          <p:cNvPr id="71" name="Shape 71"/>
-          <p:cNvSpPr/>
-          <p:nvPr>
-            <p:ph type="sldImg"/>
-          </p:nvPr>
-        </p:nvSpPr>
-        <p:spPr>
-          <a:prstGeom prst="rect">
-            <a:avLst/>
-          </a:prstGeom>
-        </p:spPr>
-        <p:txBody>
-          <a:bodyPr/>
-          <a:lstStyle/>
-          <a:p>
-            <a:pPr/>
-          </a:p>
-        </p:txBody>
-      </p:sp>
-      <p:sp>
-        <p:nvSpPr>
-          <p:cNvPr id="72" name="Shape 72"/>
-          <p:cNvSpPr/>
-          <p:nvPr>
-            <p:ph type="body" sz="quarter" idx="1"/>
-          </p:nvPr>
-        </p:nvSpPr>
-        <p:spPr>
-          <a:prstGeom prst="rect">
-            <a:avLst/>
-          </a:prstGeom>
-        </p:spPr>
-        <p:txBody>
-          <a:bodyPr/>
-          <a:lstStyle/>
-          <a:p>
-            <a:pPr>
-              <a:buNone/>
-            </a:pPr>
-            <a:r>
-              <a:t>[3장 · 약 45초]</a:t>
-            </a:r>
-          </a:p>
-          <a:p>
-            <a:pPr>
-              <a:buNone/>
-            </a:pPr>
-            <a:r>
-              <a:t/>
-            </a:r>
-          </a:p>
-          <a:p>
-            <a:pPr>
-              <a:buNone/>
-            </a:pPr>
-            <a:r>
-              <a:t>그래서 여행 하나를 중심으로 서비스를 구성했습니다. 도시와 날짜를 입력하면 그 여행 안에서 식당을 찾고, 예약을 확인하고, 일정을 만들 수 있게 한 겁니다.</a:t>
-            </a:r>
-          </a:p>
-          <a:p>
-            <a:pPr>
-              <a:buNone/>
-            </a:pPr>
-            <a:r>
-              <a:t/>
-            </a:r>
-          </a:p>
-          <a:p>
-            <a:pPr>
-              <a:buNone/>
-            </a:pPr>
-            <a:r>
-              <a:t>처음부터 모든 조건을 입력하게 하고 싶지는 않았습니다. 일단 가볼 곳을 살펴보고, 필요하면 숙소나 음식 취향을 추가할 수 있도록 했습니다. 이미 입력한 정보는 다른 화면에서도 이어서 사용하게 했고요.</a:t>
-            </a:r>
-          </a:p>
-          <a:p>
-            <a:pPr>
-              <a:buNone/>
-            </a:pPr>
-            <a:r>
-              <a:t/>
-            </a:r>
-          </a:p>
-          <a:p>
-            <a:pPr>
-              <a:buNone/>
-            </a:pPr>
-            <a:r>
-              <a:t>주로 생각한 사용자는 저처럼 직접 여행을 준비하면서 식당을 비교하는 사람입니다. 장소를 선택한 다음에 다시 다른 도구에서 처음부터 정리하지 않아도 되는 흐름을 만들고 싶었습니다.</a:t>
-            </a:r>
-          </a:p>
-          <a:p>
-            <a:pPr>
-              <a:buNone/>
-            </a:pPr>
-            <a:r>
-              <a:t/>
-            </a:r>
-          </a:p>
-          <a:p>
-            <a:pPr>
-              <a:buNone/>
-            </a:pPr>
-            <a:r>
-              <a:t>현재는 저와 초대한 소수 지인이 사용하는 비공개 서비스로 만들었습니다. 실제로 써 보면서 부족한 부분을 고쳐 나가기 위한 범위로 시작했습니다.</a:t>
-            </a:r>
-          </a:p>
-        </p:txBody>
-      </p:sp>
-    </p:spTree>
-  </p:cSld>
-  <p:clrMapOvr>
-    <a:masterClrMapping/>
-  </p:clrMapOvr>
-</p:notes>
+<ns0:notes xmlns:ns0="http://schemas.openxmlformats.org/presentationml/2006/main" xmlns:ns1="http://schemas.openxmlformats.org/drawingml/2006/main" showMasterSp="1" showMasterPhAnim="1">
+  <ns0:cSld>
+    <ns0:spTree>
+      <ns0:nvGrpSpPr>
+        <ns0:cNvPr id="1" name=""/>
+        <ns0:cNvGrpSpPr/>
+        <ns0:nvPr/>
+      </ns0:nvGrpSpPr>
+      <ns0:grpSpPr>
+        <ns1:xfrm>
+          <ns1:off x="0" y="0"/>
+          <ns1:ext cx="0" cy="0"/>
+          <ns1:chOff x="0" y="0"/>
+          <ns1:chExt cx="0" cy="0"/>
+        </ns1:xfrm>
+      </ns0:grpSpPr>
+      <ns0:sp>
+        <ns0:nvSpPr>
+          <ns0:cNvPr id="71" name="Shape 71"/>
+          <ns0:cNvSpPr/>
+          <ns0:nvPr>
+            <ns0:ph type="sldImg"/>
+          </ns0:nvPr>
+        </ns0:nvSpPr>
+        <ns0:spPr>
+          <ns1:prstGeom prst="rect">
+            <ns1:avLst/>
+          </ns1:prstGeom>
+        </ns0:spPr>
+        <ns0:txBody>
+          <ns1:bodyPr/>
+          <ns1:lstStyle/>
+          <ns1:p>
+            <ns1:pPr/>
+          </ns1:p>
+        </ns0:txBody>
+      </ns0:sp>
+      <ns0:sp>
+        <ns0:nvSpPr>
+          <ns0:cNvPr id="72" name="Shape 72"/>
+          <ns0:cNvSpPr/>
+          <ns0:nvPr>
+            <ns0:ph type="body" sz="quarter" idx="1"/>
+          </ns0:nvPr>
+        </ns0:nvSpPr>
+        <ns0:spPr>
+          <ns1:prstGeom prst="rect">
+            <ns1:avLst/>
+          </ns1:prstGeom>
+        </ns0:spPr>
+        <ns0:txBody>
+          <ns1:bodyPr/>
+          <ns1:lstStyle/>
+          <ns1:p>
+            <ns1:pPr>
+              <ns1:buNone/>
+            </ns1:pPr>
+            <ns1:r>
+              <ns1:t/>
+            </ns1:r>
+          </ns1:p>
+          <ns1:p>
+            <ns1:pPr>
+              <ns1:buNone/>
+            </ns1:pPr>
+            <ns1:r>
+              <ns1:t/>
+            </ns1:r>
+          </ns1:p>
+          <ns1:p>
+            <ns1:pPr>
+              <ns1:buNone/>
+            </ns1:pPr>
+            <ns1:r>
+              <ns1:t/>
+            </ns1:r>
+          </ns1:p>
+          <ns1:p>
+            <ns1:pPr>
+              <ns1:buNone/>
+            </ns1:pPr>
+            <ns1:r>
+              <ns1:t/>
+            </ns1:r>
+          </ns1:p>
+          <ns1:p>
+            <ns1:pPr>
+              <ns1:buNone/>
+            </ns1:pPr>
+            <ns1:r>
+              <ns1:t/>
+            </ns1:r>
+          </ns1:p>
+          <ns1:p>
+            <ns1:pPr>
+              <ns1:buNone/>
+            </ns1:pPr>
+            <ns1:r>
+              <ns1:t/>
+            </ns1:r>
+          </ns1:p>
+          <ns1:p>
+            <ns1:pPr>
+              <ns1:buNone/>
+            </ns1:pPr>
+            <ns1:r>
+              <ns1:t/>
+            </ns1:r>
+          </ns1:p>
+          <ns1:p>
+            <ns1:pPr>
+              <ns1:buNone/>
+            </ns1:pPr>
+            <ns1:r>
+              <ns1:t/>
+            </ns1:r>
+          </ns1:p>
+          <ns1:p>
+            <ns1:pPr>
+              <ns1:buNone/>
+            </ns1:pPr>
+            <ns1:r>
+              <ns1:t/>
+            </ns1:r>
+          </ns1:p>
+        </ns0:txBody>
+      </ns0:sp>
+    </ns0:spTree>
+  </ns0:cSld>
+  <ns0:clrMapOvr>
+    <ns1:masterClrMapping/>
+  </ns0:clrMapOvr>
+</ns0:notes>
 </file>
 
 <file path=ppt/notesSlides/notesSlide4.xml><?xml version="1.0" encoding="utf-8"?>
-<p:notes xmlns:a="http://schemas.openxmlformats.org/drawingml/2006/main" xmlns:r="http://schemas.openxmlformats.org/officeDocument/2006/relationships" xmlns:p="http://schemas.openxmlformats.org/presentationml/2006/main" xmlns:m="http://schemas.openxmlformats.org/officeDocument/2006/math" xmlns:a14="http://schemas.microsoft.com/office/drawing/2010/main" showMasterSp="1" showMasterPhAnim="1">
-  <p:cSld>
-    <p:spTree>
-      <p:nvGrpSpPr>
-        <p:cNvPr id="1" name=""/>
-        <p:cNvGrpSpPr/>
-        <p:nvPr/>
-      </p:nvGrpSpPr>
-      <p:grpSpPr>
-        <a:xfrm>
-          <a:off x="0" y="0"/>
-          <a:ext cx="0" cy="0"/>
-          <a:chOff x="0" y="0"/>
-          <a:chExt cx="0" cy="0"/>
-        </a:xfrm>
-      </p:grpSpPr>
-      <p:sp>
-        <p:nvSpPr>
-          <p:cNvPr id="71" name="Shape 71"/>
-          <p:cNvSpPr/>
-          <p:nvPr>
-            <p:ph type="sldImg"/>
-          </p:nvPr>
-        </p:nvSpPr>
-        <p:spPr>
-          <a:prstGeom prst="rect">
-            <a:avLst/>
-          </a:prstGeom>
-        </p:spPr>
-        <p:txBody>
-          <a:bodyPr/>
-          <a:lstStyle/>
-          <a:p>
-            <a:pPr/>
-          </a:p>
-        </p:txBody>
-      </p:sp>
-      <p:sp>
-        <p:nvSpPr>
-          <p:cNvPr id="72" name="Shape 72"/>
-          <p:cNvSpPr/>
-          <p:nvPr>
-            <p:ph type="body" sz="quarter" idx="1"/>
-          </p:nvPr>
-        </p:nvSpPr>
-        <p:spPr>
-          <a:prstGeom prst="rect">
-            <a:avLst/>
-          </a:prstGeom>
-        </p:spPr>
-        <p:txBody>
-          <a:bodyPr/>
-          <a:lstStyle/>
-          <a:p>
-            <a:pPr>
-              <a:buNone/>
-            </a:pPr>
-            <a:r>
-              <a:t>[4장 · 약 50초]</a:t>
-            </a:r>
-          </a:p>
-          <a:p>
-            <a:pPr>
-              <a:buNone/>
-            </a:pPr>
-            <a:r>
-              <a:t/>
-            </a:r>
-          </a:p>
-          <a:p>
-            <a:pPr>
-              <a:buNone/>
-            </a:pPr>
-            <a:r>
-              <a:t>고잉에서 가장 중심에 둔 기능은 장소 추천입니다. 여행을 선택하면 메인에서 최근에 살펴본 장소를 바로 볼 수 있고, 추천 화면으로 이어서 들어갈 수 있습니다.</a:t>
-            </a:r>
-          </a:p>
-          <a:p>
-            <a:pPr>
-              <a:buNone/>
-            </a:pPr>
-            <a:r>
-              <a:t/>
-            </a:r>
-          </a:p>
-          <a:p>
-            <a:pPr>
-              <a:buNone/>
-            </a:pPr>
-            <a:r>
-              <a:t>추천할 때는 여행의 도시와 날짜를 먼저 사용합니다. 음식점이나 카페처럼 원하는 종류를 고르고, 필요할 때 취향과 예산을 더합니다. 숙소 위치가 확인되면 숙소와의 거리도 함께 비교합니다. 숙소를 아직 고르지 않았다면 도심 기준이라는 걸 표시합니다.</a:t>
-            </a:r>
-          </a:p>
-          <a:p>
-            <a:pPr>
-              <a:buNone/>
-            </a:pPr>
-            <a:r>
-              <a:t/>
-            </a:r>
-          </a:p>
-          <a:p>
-            <a:pPr>
-              <a:buNone/>
-            </a:pPr>
-            <a:r>
-              <a:t>결과를 받은 뒤에는 장소의 상세 정보를 보고 바로 저장할 수 있습니다. 저장한 곳은 보관함에 모이고, 같은 날짜와 인원 조건으로 최대 세 곳까지 비교할 수 있게 했습니다.</a:t>
-            </a:r>
-          </a:p>
-          <a:p>
-            <a:pPr>
-              <a:buNone/>
-            </a:pPr>
-            <a:r>
-              <a:t/>
-            </a:r>
-          </a:p>
-          <a:p>
-            <a:pPr>
-              <a:buNone/>
-            </a:pPr>
-            <a:r>
-              <a:t>사진도 장소를 고르는 데 중요해서 확보된 사진은 함께 보여줍니다. 다만 무료 자료에는 사진이 없는 식당도 많아서, 이 부분은 앞으로 더 보완하려고 합니다. 화면은 가상 여행을 넣어 본 실제 서비스 화면입니다.</a:t>
-            </a:r>
-          </a:p>
-        </p:txBody>
-      </p:sp>
-    </p:spTree>
-  </p:cSld>
-  <p:clrMapOvr>
-    <a:masterClrMapping/>
-  </p:clrMapOvr>
-</p:notes>
+<ns0:notes xmlns:ns0="http://schemas.openxmlformats.org/presentationml/2006/main" xmlns:ns1="http://schemas.openxmlformats.org/drawingml/2006/main" showMasterSp="1" showMasterPhAnim="1">
+  <ns0:cSld>
+    <ns0:spTree>
+      <ns0:nvGrpSpPr>
+        <ns0:cNvPr id="1" name=""/>
+        <ns0:cNvGrpSpPr/>
+        <ns0:nvPr/>
+      </ns0:nvGrpSpPr>
+      <ns0:grpSpPr>
+        <ns1:xfrm>
+          <ns1:off x="0" y="0"/>
+          <ns1:ext cx="0" cy="0"/>
+          <ns1:chOff x="0" y="0"/>
+          <ns1:chExt cx="0" cy="0"/>
+        </ns1:xfrm>
+      </ns0:grpSpPr>
+      <ns0:sp>
+        <ns0:nvSpPr>
+          <ns0:cNvPr id="71" name="Shape 71"/>
+          <ns0:cNvSpPr/>
+          <ns0:nvPr>
+            <ns0:ph type="sldImg"/>
+          </ns0:nvPr>
+        </ns0:nvSpPr>
+        <ns0:spPr>
+          <ns1:prstGeom prst="rect">
+            <ns1:avLst/>
+          </ns1:prstGeom>
+        </ns0:spPr>
+        <ns0:txBody>
+          <ns1:bodyPr/>
+          <ns1:lstStyle/>
+          <ns1:p>
+            <ns1:pPr/>
+          </ns1:p>
+        </ns0:txBody>
+      </ns0:sp>
+      <ns0:sp>
+        <ns0:nvSpPr>
+          <ns0:cNvPr id="72" name="Shape 72"/>
+          <ns0:cNvSpPr/>
+          <ns0:nvPr>
+            <ns0:ph type="body" sz="quarter" idx="1"/>
+          </ns0:nvPr>
+        </ns0:nvSpPr>
+        <ns0:spPr>
+          <ns1:prstGeom prst="rect">
+            <ns1:avLst/>
+          </ns1:prstGeom>
+        </ns0:spPr>
+        <ns0:txBody>
+          <ns1:bodyPr/>
+          <ns1:lstStyle/>
+          <ns1:p>
+            <ns1:pPr>
+              <ns1:buNone/>
+            </ns1:pPr>
+            <ns1:r>
+              <ns1:t/>
+            </ns1:r>
+          </ns1:p>
+          <ns1:p>
+            <ns1:pPr>
+              <ns1:buNone/>
+            </ns1:pPr>
+            <ns1:r>
+              <ns1:t/>
+            </ns1:r>
+          </ns1:p>
+          <ns1:p>
+            <ns1:pPr>
+              <ns1:buNone/>
+            </ns1:pPr>
+            <ns1:r>
+              <ns1:t/>
+            </ns1:r>
+          </ns1:p>
+          <ns1:p>
+            <ns1:pPr>
+              <ns1:buNone/>
+            </ns1:pPr>
+            <ns1:r>
+              <ns1:t/>
+            </ns1:r>
+          </ns1:p>
+          <ns1:p>
+            <ns1:pPr>
+              <ns1:buNone/>
+            </ns1:pPr>
+            <ns1:r>
+              <ns1:t/>
+            </ns1:r>
+          </ns1:p>
+          <ns1:p>
+            <ns1:pPr>
+              <ns1:buNone/>
+            </ns1:pPr>
+            <ns1:r>
+              <ns1:t/>
+            </ns1:r>
+          </ns1:p>
+          <ns1:p>
+            <ns1:pPr>
+              <ns1:buNone/>
+            </ns1:pPr>
+            <ns1:r>
+              <ns1:t/>
+            </ns1:r>
+          </ns1:p>
+          <ns1:p>
+            <ns1:pPr>
+              <ns1:buNone/>
+            </ns1:pPr>
+            <ns1:r>
+              <ns1:t/>
+            </ns1:r>
+          </ns1:p>
+          <ns1:p>
+            <ns1:pPr>
+              <ns1:buNone/>
+            </ns1:pPr>
+            <ns1:r>
+              <ns1:t/>
+            </ns1:r>
+          </ns1:p>
+        </ns0:txBody>
+      </ns0:sp>
+    </ns0:spTree>
+  </ns0:cSld>
+  <ns0:clrMapOvr>
+    <ns1:masterClrMapping/>
+  </ns0:clrMapOvr>
+</ns0:notes>
 </file>
 
 <file path=ppt/notesSlides/notesSlide5.xml><?xml version="1.0" encoding="utf-8"?>
-<p:notes xmlns:a="http://schemas.openxmlformats.org/drawingml/2006/main" xmlns:r="http://schemas.openxmlformats.org/officeDocument/2006/relationships" xmlns:p="http://schemas.openxmlformats.org/presentationml/2006/main" xmlns:m="http://schemas.openxmlformats.org/officeDocument/2006/math" xmlns:a14="http://schemas.microsoft.com/office/drawing/2010/main" showMasterSp="1" showMasterPhAnim="1">
-  <p:cSld>
-    <p:spTree>
-      <p:nvGrpSpPr>
-        <p:cNvPr id="1" name=""/>
-        <p:cNvGrpSpPr/>
-        <p:nvPr/>
-      </p:nvGrpSpPr>
-      <p:grpSpPr>
-        <a:xfrm>
-          <a:off x="0" y="0"/>
-          <a:ext cx="0" cy="0"/>
-          <a:chOff x="0" y="0"/>
-          <a:chExt cx="0" cy="0"/>
-        </a:xfrm>
-      </p:grpSpPr>
-      <p:sp>
-        <p:nvSpPr>
-          <p:cNvPr id="71" name="Shape 71"/>
-          <p:cNvSpPr/>
-          <p:nvPr>
-            <p:ph type="sldImg"/>
-          </p:nvPr>
-        </p:nvSpPr>
-        <p:spPr>
-          <a:prstGeom prst="rect">
-            <a:avLst/>
-          </a:prstGeom>
-        </p:spPr>
-        <p:txBody>
-          <a:bodyPr/>
-          <a:lstStyle/>
-          <a:p>
-            <a:pPr/>
-          </a:p>
-        </p:txBody>
-      </p:sp>
-      <p:sp>
-        <p:nvSpPr>
-          <p:cNvPr id="72" name="Shape 72"/>
-          <p:cNvSpPr/>
-          <p:nvPr>
-            <p:ph type="body" sz="quarter" idx="1"/>
-          </p:nvPr>
-        </p:nvSpPr>
-        <p:spPr>
-          <a:prstGeom prst="rect">
-            <a:avLst/>
-          </a:prstGeom>
-        </p:spPr>
-        <p:txBody>
-          <a:bodyPr/>
-          <a:lstStyle/>
-          <a:p>
-            <a:pPr>
-              <a:buNone/>
-            </a:pPr>
-            <a:r>
-              <a:t>[5장 · 약 65초]</a:t>
-            </a:r>
-          </a:p>
-          <a:p>
-            <a:pPr>
-              <a:buNone/>
-            </a:pPr>
-            <a:r>
-              <a:t/>
-            </a:r>
-          </a:p>
-          <a:p>
-            <a:pPr>
-              <a:buNone/>
-            </a:pPr>
-            <a:r>
-              <a:t>추천을 기획하면서 가장 해보고 싶었던 건 현지어 리뷰를 활용하는 것이었습니다. 저는 여행을 가면 한국어로 이미 많이 알려진 식당도 가지만, 다른 식당도 조금 더 찾아보고 싶은 편입니다.</a:t>
-            </a:r>
-          </a:p>
-          <a:p>
-            <a:pPr>
-              <a:buNone/>
-            </a:pPr>
-            <a:r>
-              <a:t/>
-            </a:r>
-          </a:p>
-          <a:p>
-            <a:pPr>
-              <a:buNone/>
-            </a:pPr>
-            <a:r>
-              <a:t>그래서 현지 언어로 쓴 리뷰가 충분히 많고, 한국어 리뷰는 적게 관측되는 곳을 골라 볼 수 있게 하려고 했습니다. 평점과 평가 수가 어느 정도 있는지도 같이 보고요. 사용자가 외국어 리뷰를 하나씩 넘겨 보던 수고를 줄여 주고 싶었습니다.</a:t>
-            </a:r>
-          </a:p>
-          <a:p>
-            <a:pPr>
-              <a:buNone/>
-            </a:pPr>
-            <a:r>
-              <a:t/>
-            </a:r>
-          </a:p>
-          <a:p>
-            <a:pPr>
-              <a:buNone/>
-            </a:pPr>
-            <a:r>
-              <a:t>그렇다고 유명한 곳을 제외하는 건 아쉽다고 생각했습니다. 처음 가는 도시에서는 꼭 가보고 싶은 대표 명소나 잘 알려진 식당도 있으니까요. 그래서 현지 탐색과 유명한 곳을 따로 나눴습니다. 어느 쪽이 더 좋다고 정하기보다, 사용자가 원하는 경험에 맞춰 고르게 한 겁니다.</a:t>
-            </a:r>
-          </a:p>
-          <a:p>
-            <a:pPr>
-              <a:buNone/>
-            </a:pPr>
-            <a:r>
-              <a:t/>
-            </a:r>
-          </a:p>
-          <a:p>
-            <a:pPr>
-              <a:buNone/>
-            </a:pPr>
-            <a:r>
-              <a:t>한 가지 주의한 점은 리뷰 언어만으로 현지 주민이라고 단정할 수 없다는 것이었습니다. 그래서 관측한 리뷰의 언어 구성을 기준으로 설계했고, 언어를 판별하지 못한 리뷰도 따로 남깁니다.</a:t>
-            </a:r>
-          </a:p>
-          <a:p>
-            <a:pPr>
-              <a:buNone/>
-            </a:pPr>
-            <a:r>
-              <a:t/>
-            </a:r>
-          </a:p>
-          <a:p>
-            <a:pPr>
-              <a:buNone/>
-            </a:pPr>
-            <a:r>
-              <a:t>이 엄격한 현지어 추천은 수집과 계산 구조를 만들었지만, 실제 자료와 언어 품질을 더 확인한 뒤 켤 예정입니다. 앞으로 고잉의 차이를 가장 잘 보여 줄 기능으로 발전시키고 싶습니다.</a:t>
-            </a:r>
-          </a:p>
-        </p:txBody>
-      </p:sp>
-    </p:spTree>
-  </p:cSld>
-  <p:clrMapOvr>
-    <a:masterClrMapping/>
-  </p:clrMapOvr>
-</p:notes>
+<ns0:notes xmlns:ns0="http://schemas.openxmlformats.org/presentationml/2006/main" xmlns:ns1="http://schemas.openxmlformats.org/drawingml/2006/main" showMasterSp="1" showMasterPhAnim="1">
+  <ns0:cSld>
+    <ns0:spTree>
+      <ns0:nvGrpSpPr>
+        <ns0:cNvPr id="1" name=""/>
+        <ns0:cNvGrpSpPr/>
+        <ns0:nvPr/>
+      </ns0:nvGrpSpPr>
+      <ns0:grpSpPr>
+        <ns1:xfrm>
+          <ns1:off x="0" y="0"/>
+          <ns1:ext cx="0" cy="0"/>
+          <ns1:chOff x="0" y="0"/>
+          <ns1:chExt cx="0" cy="0"/>
+        </ns1:xfrm>
+      </ns0:grpSpPr>
+      <ns0:sp>
+        <ns0:nvSpPr>
+          <ns0:cNvPr id="71" name="Shape 71"/>
+          <ns0:cNvSpPr/>
+          <ns0:nvPr>
+            <ns0:ph type="sldImg"/>
+          </ns0:nvPr>
+        </ns0:nvSpPr>
+        <ns0:spPr>
+          <ns1:prstGeom prst="rect">
+            <ns1:avLst/>
+          </ns1:prstGeom>
+        </ns0:spPr>
+        <ns0:txBody>
+          <ns1:bodyPr/>
+          <ns1:lstStyle/>
+          <ns1:p>
+            <ns1:pPr/>
+          </ns1:p>
+        </ns0:txBody>
+      </ns0:sp>
+      <ns0:sp>
+        <ns0:nvSpPr>
+          <ns0:cNvPr id="72" name="Shape 72"/>
+          <ns0:cNvSpPr/>
+          <ns0:nvPr>
+            <ns0:ph type="body" sz="quarter" idx="1"/>
+          </ns0:nvPr>
+        </ns0:nvSpPr>
+        <ns0:spPr>
+          <ns1:prstGeom prst="rect">
+            <ns1:avLst/>
+          </ns1:prstGeom>
+        </ns0:spPr>
+        <ns0:txBody>
+          <ns1:bodyPr/>
+          <ns1:lstStyle/>
+          <ns1:p>
+            <ns1:pPr>
+              <ns1:buNone/>
+            </ns1:pPr>
+            <ns1:r>
+              <ns1:t/>
+            </ns1:r>
+          </ns1:p>
+          <ns1:p>
+            <ns1:pPr>
+              <ns1:buNone/>
+            </ns1:pPr>
+            <ns1:r>
+              <ns1:t/>
+            </ns1:r>
+          </ns1:p>
+          <ns1:p>
+            <ns1:pPr>
+              <ns1:buNone/>
+            </ns1:pPr>
+            <ns1:r>
+              <ns1:t/>
+            </ns1:r>
+          </ns1:p>
+          <ns1:p>
+            <ns1:pPr>
+              <ns1:buNone/>
+            </ns1:pPr>
+            <ns1:r>
+              <ns1:t/>
+            </ns1:r>
+          </ns1:p>
+          <ns1:p>
+            <ns1:pPr>
+              <ns1:buNone/>
+            </ns1:pPr>
+            <ns1:r>
+              <ns1:t/>
+            </ns1:r>
+          </ns1:p>
+          <ns1:p>
+            <ns1:pPr>
+              <ns1:buNone/>
+            </ns1:pPr>
+            <ns1:r>
+              <ns1:t/>
+            </ns1:r>
+          </ns1:p>
+          <ns1:p>
+            <ns1:pPr>
+              <ns1:buNone/>
+            </ns1:pPr>
+            <ns1:r>
+              <ns1:t/>
+            </ns1:r>
+          </ns1:p>
+          <ns1:p>
+            <ns1:pPr>
+              <ns1:buNone/>
+            </ns1:pPr>
+            <ns1:r>
+              <ns1:t/>
+            </ns1:r>
+          </ns1:p>
+          <ns1:p>
+            <ns1:pPr>
+              <ns1:buNone/>
+            </ns1:pPr>
+            <ns1:r>
+              <ns1:t/>
+            </ns1:r>
+          </ns1:p>
+          <ns1:p>
+            <ns1:pPr>
+              <ns1:buNone/>
+            </ns1:pPr>
+            <ns1:r>
+              <ns1:t/>
+            </ns1:r>
+          </ns1:p>
+          <ns1:p>
+            <ns1:pPr>
+              <ns1:buNone/>
+            </ns1:pPr>
+            <ns1:r>
+              <ns1:t/>
+            </ns1:r>
+          </ns1:p>
+        </ns0:txBody>
+      </ns0:sp>
+    </ns0:spTree>
+  </ns0:cSld>
+  <ns0:clrMapOvr>
+    <ns1:masterClrMapping/>
+  </ns0:clrMapOvr>
+</ns0:notes>
 </file>
 
 <file path=ppt/notesSlides/notesSlide6.xml><?xml version="1.0" encoding="utf-8"?>
-<p:notes xmlns:a="http://schemas.openxmlformats.org/drawingml/2006/main" xmlns:r="http://schemas.openxmlformats.org/officeDocument/2006/relationships" xmlns:p="http://schemas.openxmlformats.org/presentationml/2006/main" xmlns:m="http://schemas.openxmlformats.org/officeDocument/2006/math" xmlns:a14="http://schemas.microsoft.com/office/drawing/2010/main" showMasterSp="1" showMasterPhAnim="1">
-  <p:cSld>
-    <p:spTree>
-      <p:nvGrpSpPr>
-        <p:cNvPr id="1" name=""/>
-        <p:cNvGrpSpPr/>
-        <p:nvPr/>
-      </p:nvGrpSpPr>
-      <p:grpSpPr>
-        <a:xfrm>
-          <a:off x="0" y="0"/>
-          <a:ext cx="0" cy="0"/>
-          <a:chOff x="0" y="0"/>
-          <a:chExt cx="0" cy="0"/>
-        </a:xfrm>
-      </p:grpSpPr>
-      <p:sp>
-        <p:nvSpPr>
-          <p:cNvPr id="71" name="Shape 71"/>
-          <p:cNvSpPr/>
-          <p:nvPr>
-            <p:ph type="sldImg"/>
-          </p:nvPr>
-        </p:nvSpPr>
-        <p:spPr>
-          <a:prstGeom prst="rect">
-            <a:avLst/>
-          </a:prstGeom>
-        </p:spPr>
-        <p:txBody>
-          <a:bodyPr/>
-          <a:lstStyle/>
-          <a:p>
-            <a:pPr/>
-          </a:p>
-        </p:txBody>
-      </p:sp>
-      <p:sp>
-        <p:nvSpPr>
-          <p:cNvPr id="72" name="Shape 72"/>
-          <p:cNvSpPr/>
-          <p:nvPr>
-            <p:ph type="body" sz="quarter" idx="1"/>
-          </p:nvPr>
-        </p:nvSpPr>
-        <p:spPr>
-          <a:prstGeom prst="rect">
-            <a:avLst/>
-          </a:prstGeom>
-        </p:spPr>
-        <p:txBody>
-          <a:bodyPr/>
-          <a:lstStyle/>
-          <a:p>
-            <a:pPr>
-              <a:buNone/>
-            </a:pPr>
-            <a:r>
-              <a:t>[6장 · 약 50초]</a:t>
-            </a:r>
-          </a:p>
-          <a:p>
-            <a:pPr>
-              <a:buNone/>
-            </a:pPr>
-            <a:r>
-              <a:t/>
-            </a:r>
-          </a:p>
-          <a:p>
-            <a:pPr>
-              <a:buNone/>
-            </a:pPr>
-            <a:r>
-              <a:t>처음 구현한 기능은 예약 메일 분석이었습니다. 항공권이나 호텔 확인 메일을 올리면 그 안에서 날짜, 시간, 장소를 읽어서 예약으로 정리합니다.</a:t>
-            </a:r>
-          </a:p>
-          <a:p>
-            <a:pPr>
-              <a:buNone/>
-            </a:pPr>
-            <a:r>
-              <a:t/>
-            </a:r>
-          </a:p>
-          <a:p>
-            <a:pPr>
-              <a:buNone/>
-            </a:pPr>
-            <a:r>
-              <a:t>메일은 형태가 제각각이라서 내용을 읽는 부분에 AI를 사용했습니다. 다만 AI가 읽었다고 바로 맞는 값으로 확정하지는 않았습니다. 사용자가 결과를 확인하고 잘못된 값을 고칠 수 있게 했습니다.</a:t>
-            </a:r>
-          </a:p>
-          <a:p>
-            <a:pPr>
-              <a:buNone/>
-            </a:pPr>
-            <a:r>
-              <a:t/>
-            </a:r>
-          </a:p>
-          <a:p>
-            <a:pPr>
-              <a:buNone/>
-            </a:pPr>
-            <a:r>
-              <a:t>여기서 직접 수정한 내용과 처음 추출한 내용은 따로 저장합니다. 나중에 같은 메일을 다시 분석하더라도 사용자가 고친 값이 사라지지 않도록 하기 위해서입니다. 한 메일 안에 여러 예약이 있거나 왕복 항공편이 들어 있는 경우도 나눠서 보관합니다.</a:t>
-            </a:r>
-          </a:p>
-          <a:p>
-            <a:pPr>
-              <a:buNone/>
-            </a:pPr>
-            <a:r>
-              <a:t/>
-            </a:r>
-          </a:p>
-          <a:p>
-            <a:pPr>
-              <a:buNone/>
-            </a:pPr>
-            <a:r>
-              <a:t>화면은 가상 메일로 만든 예약 예시입니다. 메일이 없어도 예약을 직접 추가할 수 있고, 분석 중 오류가 나면 이전 예약은 유지합니다. 사용자가 이미 정리한 내용을 안전하게 남기는 것도 중요한 기능이라고 생각했습니다.</a:t>
-            </a:r>
-          </a:p>
-        </p:txBody>
-      </p:sp>
-    </p:spTree>
-  </p:cSld>
-  <p:clrMapOvr>
-    <a:masterClrMapping/>
-  </p:clrMapOvr>
-</p:notes>
+<ns0:notes xmlns:ns0="http://schemas.openxmlformats.org/presentationml/2006/main" xmlns:ns1="http://schemas.openxmlformats.org/drawingml/2006/main" showMasterSp="1" showMasterPhAnim="1">
+  <ns0:cSld>
+    <ns0:spTree>
+      <ns0:nvGrpSpPr>
+        <ns0:cNvPr id="1" name=""/>
+        <ns0:cNvGrpSpPr/>
+        <ns0:nvPr/>
+      </ns0:nvGrpSpPr>
+      <ns0:grpSpPr>
+        <ns1:xfrm>
+          <ns1:off x="0" y="0"/>
+          <ns1:ext cx="0" cy="0"/>
+          <ns1:chOff x="0" y="0"/>
+          <ns1:chExt cx="0" cy="0"/>
+        </ns1:xfrm>
+      </ns0:grpSpPr>
+      <ns0:sp>
+        <ns0:nvSpPr>
+          <ns0:cNvPr id="71" name="Shape 71"/>
+          <ns0:cNvSpPr/>
+          <ns0:nvPr>
+            <ns0:ph type="sldImg"/>
+          </ns0:nvPr>
+        </ns0:nvSpPr>
+        <ns0:spPr>
+          <ns1:prstGeom prst="rect">
+            <ns1:avLst/>
+          </ns1:prstGeom>
+        </ns0:spPr>
+        <ns0:txBody>
+          <ns1:bodyPr/>
+          <ns1:lstStyle/>
+          <ns1:p>
+            <ns1:pPr/>
+          </ns1:p>
+        </ns0:txBody>
+      </ns0:sp>
+      <ns0:sp>
+        <ns0:nvSpPr>
+          <ns0:cNvPr id="72" name="Shape 72"/>
+          <ns0:cNvSpPr/>
+          <ns0:nvPr>
+            <ns0:ph type="body" sz="quarter" idx="1"/>
+          </ns0:nvPr>
+        </ns0:nvSpPr>
+        <ns0:spPr>
+          <ns1:prstGeom prst="rect">
+            <ns1:avLst/>
+          </ns1:prstGeom>
+        </ns0:spPr>
+        <ns0:txBody>
+          <ns1:bodyPr/>
+          <ns1:lstStyle/>
+          <ns1:p>
+            <ns1:pPr>
+              <ns1:buNone/>
+            </ns1:pPr>
+            <ns1:r>
+              <ns1:t/>
+            </ns1:r>
+          </ns1:p>
+          <ns1:p>
+            <ns1:pPr>
+              <ns1:buNone/>
+            </ns1:pPr>
+            <ns1:r>
+              <ns1:t/>
+            </ns1:r>
+          </ns1:p>
+          <ns1:p>
+            <ns1:pPr>
+              <ns1:buNone/>
+            </ns1:pPr>
+            <ns1:r>
+              <ns1:t/>
+            </ns1:r>
+          </ns1:p>
+          <ns1:p>
+            <ns1:pPr>
+              <ns1:buNone/>
+            </ns1:pPr>
+            <ns1:r>
+              <ns1:t/>
+            </ns1:r>
+          </ns1:p>
+          <ns1:p>
+            <ns1:pPr>
+              <ns1:buNone/>
+            </ns1:pPr>
+            <ns1:r>
+              <ns1:t/>
+            </ns1:r>
+          </ns1:p>
+          <ns1:p>
+            <ns1:pPr>
+              <ns1:buNone/>
+            </ns1:pPr>
+            <ns1:r>
+              <ns1:t/>
+            </ns1:r>
+          </ns1:p>
+          <ns1:p>
+            <ns1:pPr>
+              <ns1:buNone/>
+            </ns1:pPr>
+            <ns1:r>
+              <ns1:t/>
+            </ns1:r>
+          </ns1:p>
+          <ns1:p>
+            <ns1:pPr>
+              <ns1:buNone/>
+            </ns1:pPr>
+            <ns1:r>
+              <ns1:t/>
+            </ns1:r>
+          </ns1:p>
+          <ns1:p>
+            <ns1:pPr>
+              <ns1:buNone/>
+            </ns1:pPr>
+            <ns1:r>
+              <ns1:t/>
+            </ns1:r>
+          </ns1:p>
+        </ns0:txBody>
+      </ns0:sp>
+    </ns0:spTree>
+  </ns0:cSld>
+  <ns0:clrMapOvr>
+    <ns1:masterClrMapping/>
+  </ns0:clrMapOvr>
+</ns0:notes>
 </file>
 
 <file path=ppt/notesSlides/notesSlide7.xml><?xml version="1.0" encoding="utf-8"?>
-<p:notes xmlns:a="http://schemas.openxmlformats.org/drawingml/2006/main" xmlns:r="http://schemas.openxmlformats.org/officeDocument/2006/relationships" xmlns:p="http://schemas.openxmlformats.org/presentationml/2006/main" xmlns:m="http://schemas.openxmlformats.org/officeDocument/2006/math" xmlns:a14="http://schemas.microsoft.com/office/drawing/2010/main" showMasterSp="1" showMasterPhAnim="1">
-  <p:cSld>
-    <p:spTree>
-      <p:nvGrpSpPr>
-        <p:cNvPr id="1" name=""/>
-        <p:cNvGrpSpPr/>
-        <p:nvPr/>
-      </p:nvGrpSpPr>
-      <p:grpSpPr>
-        <a:xfrm>
-          <a:off x="0" y="0"/>
-          <a:ext cx="0" cy="0"/>
-          <a:chOff x="0" y="0"/>
-          <a:chExt cx="0" cy="0"/>
-        </a:xfrm>
-      </p:grpSpPr>
-      <p:sp>
-        <p:nvSpPr>
-          <p:cNvPr id="71" name="Shape 71"/>
-          <p:cNvSpPr/>
-          <p:nvPr>
-            <p:ph type="sldImg"/>
-          </p:nvPr>
-        </p:nvSpPr>
-        <p:spPr>
-          <a:prstGeom prst="rect">
-            <a:avLst/>
-          </a:prstGeom>
-        </p:spPr>
-        <p:txBody>
-          <a:bodyPr/>
-          <a:lstStyle/>
-          <a:p>
-            <a:pPr/>
-          </a:p>
-        </p:txBody>
-      </p:sp>
-      <p:sp>
-        <p:nvSpPr>
-          <p:cNvPr id="72" name="Shape 72"/>
-          <p:cNvSpPr/>
-          <p:nvPr>
-            <p:ph type="body" sz="quarter" idx="1"/>
-          </p:nvPr>
-        </p:nvSpPr>
-        <p:spPr>
-          <a:prstGeom prst="rect">
-            <a:avLst/>
-          </a:prstGeom>
-        </p:spPr>
-        <p:txBody>
-          <a:bodyPr/>
-          <a:lstStyle/>
-          <a:p>
-            <a:pPr>
-              <a:buNone/>
-            </a:pPr>
-            <a:r>
-              <a:t>[7장 · 약 45초]</a:t>
-            </a:r>
-          </a:p>
-          <a:p>
-            <a:pPr>
-              <a:buNone/>
-            </a:pPr>
-            <a:r>
-              <a:t/>
-            </a:r>
-          </a:p>
-          <a:p>
-            <a:pPr>
-              <a:buNone/>
-            </a:pPr>
-            <a:r>
-              <a:t>예약을 정리한 다음에는 그 내용을 쉽게 다시 꺼내 쓸 수 있어야 한다고 생각했습니다. 그래서 현재 여행에 대해 질문하는 기능을 넣었습니다.</a:t>
-            </a:r>
-          </a:p>
-          <a:p>
-            <a:pPr>
-              <a:buNone/>
-            </a:pPr>
-            <a:r>
-              <a:t/>
-            </a:r>
-          </a:p>
-          <a:p>
-            <a:pPr>
-              <a:buNone/>
-            </a:pPr>
-            <a:r>
-              <a:t>예를 들면 첫날 예약을 모두 알려 달라고 하거나, 호텔 체크아웃 시간이 언제인지 물어볼 수 있습니다. AI 대화는 메인에서도 바로 시작할 수 있게 했습니다. 기능이 더보기 안에만 있으면, 만들어 놓고도 잘 쓰지 않게 된다는 걸 느꼈기 때문입니다.</a:t>
-            </a:r>
-          </a:p>
-          <a:p>
-            <a:pPr>
-              <a:buNone/>
-            </a:pPr>
-            <a:r>
-              <a:t/>
-            </a:r>
-          </a:p>
-          <a:p>
-            <a:pPr>
-              <a:buNone/>
-            </a:pPr>
-            <a:r>
-              <a:t>질문에 따라 처리하는 방식은 조금 다릅니다. 하루 예약 전체를 묻는 경우에는 저장된 예약을 날짜로 조회합니다. 환불 규정처럼 메일 내용이 필요한 경우에는 관련된 본문을 찾고 AI가 답변을 정리합니다.</a:t>
-            </a:r>
-          </a:p>
-          <a:p>
-            <a:pPr>
-              <a:buNone/>
-            </a:pPr>
-            <a:r>
-              <a:t/>
-            </a:r>
-          </a:p>
-          <a:p>
-            <a:pPr>
-              <a:buNone/>
-            </a:pPr>
-            <a:r>
-              <a:t>예약 목록을 읽는 질문과 문장을 이해해야 하는 질문을 구분해서, 필요한 내용이 빠지지 않도록 만들었습니다. 사용자는 어떤 처리 방식인지 몰라도 평소 말하듯 질문할 수 있습니다.</a:t>
-            </a:r>
-          </a:p>
-        </p:txBody>
-      </p:sp>
-    </p:spTree>
-  </p:cSld>
-  <p:clrMapOvr>
-    <a:masterClrMapping/>
-  </p:clrMapOvr>
-</p:notes>
+<ns0:notes xmlns:ns0="http://schemas.openxmlformats.org/presentationml/2006/main" xmlns:ns1="http://schemas.openxmlformats.org/drawingml/2006/main" showMasterSp="1" showMasterPhAnim="1">
+  <ns0:cSld>
+    <ns0:spTree>
+      <ns0:nvGrpSpPr>
+        <ns0:cNvPr id="1" name=""/>
+        <ns0:cNvGrpSpPr/>
+        <ns0:nvPr/>
+      </ns0:nvGrpSpPr>
+      <ns0:grpSpPr>
+        <ns1:xfrm>
+          <ns1:off x="0" y="0"/>
+          <ns1:ext cx="0" cy="0"/>
+          <ns1:chOff x="0" y="0"/>
+          <ns1:chExt cx="0" cy="0"/>
+        </ns1:xfrm>
+      </ns0:grpSpPr>
+      <ns0:sp>
+        <ns0:nvSpPr>
+          <ns0:cNvPr id="71" name="Shape 71"/>
+          <ns0:cNvSpPr/>
+          <ns0:nvPr>
+            <ns0:ph type="sldImg"/>
+          </ns0:nvPr>
+        </ns0:nvSpPr>
+        <ns0:spPr>
+          <ns1:prstGeom prst="rect">
+            <ns1:avLst/>
+          </ns1:prstGeom>
+        </ns0:spPr>
+        <ns0:txBody>
+          <ns1:bodyPr/>
+          <ns1:lstStyle/>
+          <ns1:p>
+            <ns1:pPr/>
+          </ns1:p>
+        </ns0:txBody>
+      </ns0:sp>
+      <ns0:sp>
+        <ns0:nvSpPr>
+          <ns0:cNvPr id="72" name="Shape 72"/>
+          <ns0:cNvSpPr/>
+          <ns0:nvPr>
+            <ns0:ph type="body" sz="quarter" idx="1"/>
+          </ns0:nvPr>
+        </ns0:nvSpPr>
+        <ns0:spPr>
+          <ns1:prstGeom prst="rect">
+            <ns1:avLst/>
+          </ns1:prstGeom>
+        </ns0:spPr>
+        <ns0:txBody>
+          <ns1:bodyPr/>
+          <ns1:lstStyle/>
+          <ns1:p>
+            <ns1:pPr>
+              <ns1:buNone/>
+            </ns1:pPr>
+            <ns1:r>
+              <ns1:t/>
+            </ns1:r>
+          </ns1:p>
+          <ns1:p>
+            <ns1:pPr>
+              <ns1:buNone/>
+            </ns1:pPr>
+            <ns1:r>
+              <ns1:t/>
+            </ns1:r>
+          </ns1:p>
+          <ns1:p>
+            <ns1:pPr>
+              <ns1:buNone/>
+            </ns1:pPr>
+            <ns1:r>
+              <ns1:t/>
+            </ns1:r>
+          </ns1:p>
+          <ns1:p>
+            <ns1:pPr>
+              <ns1:buNone/>
+            </ns1:pPr>
+            <ns1:r>
+              <ns1:t/>
+            </ns1:r>
+          </ns1:p>
+          <ns1:p>
+            <ns1:pPr>
+              <ns1:buNone/>
+            </ns1:pPr>
+            <ns1:r>
+              <ns1:t/>
+            </ns1:r>
+          </ns1:p>
+          <ns1:p>
+            <ns1:pPr>
+              <ns1:buNone/>
+            </ns1:pPr>
+            <ns1:r>
+              <ns1:t/>
+            </ns1:r>
+          </ns1:p>
+          <ns1:p>
+            <ns1:pPr>
+              <ns1:buNone/>
+            </ns1:pPr>
+            <ns1:r>
+              <ns1:t/>
+            </ns1:r>
+          </ns1:p>
+          <ns1:p>
+            <ns1:pPr>
+              <ns1:buNone/>
+            </ns1:pPr>
+            <ns1:r>
+              <ns1:t/>
+            </ns1:r>
+          </ns1:p>
+          <ns1:p>
+            <ns1:pPr>
+              <ns1:buNone/>
+            </ns1:pPr>
+            <ns1:r>
+              <ns1:t/>
+            </ns1:r>
+          </ns1:p>
+        </ns0:txBody>
+      </ns0:sp>
+    </ns0:spTree>
+  </ns0:cSld>
+  <ns0:clrMapOvr>
+    <ns1:masterClrMapping/>
+  </ns0:clrMapOvr>
+</ns0:notes>
 </file>
 
 <file path=ppt/notesSlides/notesSlide8.xml><?xml version="1.0" encoding="utf-8"?>
-<p:notes xmlns:a="http://schemas.openxmlformats.org/drawingml/2006/main" xmlns:r="http://schemas.openxmlformats.org/officeDocument/2006/relationships" xmlns:p="http://schemas.openxmlformats.org/presentationml/2006/main" xmlns:m="http://schemas.openxmlformats.org/officeDocument/2006/math" xmlns:a14="http://schemas.microsoft.com/office/drawing/2010/main" showMasterSp="1" showMasterPhAnim="1">
-  <p:cSld>
-    <p:spTree>
-      <p:nvGrpSpPr>
-        <p:cNvPr id="1" name=""/>
-        <p:cNvGrpSpPr/>
-        <p:nvPr/>
-      </p:nvGrpSpPr>
-      <p:grpSpPr>
-        <a:xfrm>
-          <a:off x="0" y="0"/>
-          <a:ext cx="0" cy="0"/>
-          <a:chOff x="0" y="0"/>
-          <a:chExt cx="0" cy="0"/>
-        </a:xfrm>
-      </p:grpSpPr>
-      <p:sp>
-        <p:nvSpPr>
-          <p:cNvPr id="71" name="Shape 71"/>
-          <p:cNvSpPr/>
-          <p:nvPr>
-            <p:ph type="sldImg"/>
-          </p:nvPr>
-        </p:nvSpPr>
-        <p:spPr>
-          <a:prstGeom prst="rect">
-            <a:avLst/>
-          </a:prstGeom>
-        </p:spPr>
-        <p:txBody>
-          <a:bodyPr/>
-          <a:lstStyle/>
-          <a:p>
-            <a:pPr/>
-          </a:p>
-        </p:txBody>
-      </p:sp>
-      <p:sp>
-        <p:nvSpPr>
-          <p:cNvPr id="72" name="Shape 72"/>
-          <p:cNvSpPr/>
-          <p:nvPr>
-            <p:ph type="body" sz="quarter" idx="1"/>
-          </p:nvPr>
-        </p:nvSpPr>
-        <p:spPr>
-          <a:prstGeom prst="rect">
-            <a:avLst/>
-          </a:prstGeom>
-        </p:spPr>
-        <p:txBody>
-          <a:bodyPr/>
-          <a:lstStyle/>
-          <a:p>
-            <a:pPr>
-              <a:buNone/>
-            </a:pPr>
-            <a:r>
-              <a:t>[8장 · 약 45초]</a:t>
-            </a:r>
-          </a:p>
-          <a:p>
-            <a:pPr>
-              <a:buNone/>
-            </a:pPr>
-            <a:r>
-              <a:t/>
-            </a:r>
-          </a:p>
-          <a:p>
-            <a:pPr>
-              <a:buNone/>
-            </a:pPr>
-            <a:r>
-              <a:t>장소를 골랐으면 실제로 언제 갈지도 정해야 합니다. 그래서 보관한 장소를 하루 일정으로 이어서 사용할 수 있게 했습니다.</a:t>
-            </a:r>
-          </a:p>
-          <a:p>
-            <a:pPr>
-              <a:buNone/>
-            </a:pPr>
-            <a:r>
-              <a:t/>
-            </a:r>
-          </a:p>
-          <a:p>
-            <a:pPr>
-              <a:buNone/>
-            </a:pPr>
-            <a:r>
-              <a:t>일정을 만들 때는 이미 확정한 예약부터 배치합니다. 그다음 남은 시간에 다른 장소를 넣을 수 있는지 살펴봅니다. 이동과 머무는 시간, 영업시간을 함께 확인하고, 일정에 들어가지 못한 곳은 이유를 보여줍니다.</a:t>
-            </a:r>
-          </a:p>
-          <a:p>
-            <a:pPr>
-              <a:buNone/>
-            </a:pPr>
-            <a:r>
-              <a:t/>
-            </a:r>
-          </a:p>
-          <a:p>
-            <a:pPr>
-              <a:buNone/>
-            </a:pPr>
-            <a:r>
-              <a:t>편집할 때도 바로 원래 일정을 바꾸지는 않습니다. 먼저 변경 내용을 보고 적용할 수 있게 했고, 적용한 뒤에는 되돌리기도 가능합니다. 확정 예약이 서로 겹치면 예약을 마음대로 옮기지 않고 사용자에게 알려 줍니다.</a:t>
-            </a:r>
-          </a:p>
-          <a:p>
-            <a:pPr>
-              <a:buNone/>
-            </a:pPr>
-            <a:r>
-              <a:t/>
-            </a:r>
-          </a:p>
-          <a:p>
-            <a:pPr>
-              <a:buNone/>
-            </a:pPr>
-            <a:r>
-              <a:t>제가 원했던 건 그럴듯해 보이는 일정표보다, 실제 여행 준비에서 다시 확인하고 고쳐 쓸 수 있는 일정이었습니다. 그래서 자동 생성과 사용자의 수정이 이어지도록 구성했습니다.</a:t>
-            </a:r>
-          </a:p>
-        </p:txBody>
-      </p:sp>
-    </p:spTree>
-  </p:cSld>
-  <p:clrMapOvr>
-    <a:masterClrMapping/>
-  </p:clrMapOvr>
-</p:notes>
+<ns0:notes xmlns:ns0="http://schemas.openxmlformats.org/presentationml/2006/main" xmlns:ns1="http://schemas.openxmlformats.org/drawingml/2006/main" showMasterSp="1" showMasterPhAnim="1">
+  <ns0:cSld>
+    <ns0:spTree>
+      <ns0:nvGrpSpPr>
+        <ns0:cNvPr id="1" name=""/>
+        <ns0:cNvGrpSpPr/>
+        <ns0:nvPr/>
+      </ns0:nvGrpSpPr>
+      <ns0:grpSpPr>
+        <ns1:xfrm>
+          <ns1:off x="0" y="0"/>
+          <ns1:ext cx="0" cy="0"/>
+          <ns1:chOff x="0" y="0"/>
+          <ns1:chExt cx="0" cy="0"/>
+        </ns1:xfrm>
+      </ns0:grpSpPr>
+      <ns0:sp>
+        <ns0:nvSpPr>
+          <ns0:cNvPr id="71" name="Shape 71"/>
+          <ns0:cNvSpPr/>
+          <ns0:nvPr>
+            <ns0:ph type="sldImg"/>
+          </ns0:nvPr>
+        </ns0:nvSpPr>
+        <ns0:spPr>
+          <ns1:prstGeom prst="rect">
+            <ns1:avLst/>
+          </ns1:prstGeom>
+        </ns0:spPr>
+        <ns0:txBody>
+          <ns1:bodyPr/>
+          <ns1:lstStyle/>
+          <ns1:p>
+            <ns1:pPr/>
+          </ns1:p>
+        </ns0:txBody>
+      </ns0:sp>
+      <ns0:sp>
+        <ns0:nvSpPr>
+          <ns0:cNvPr id="72" name="Shape 72"/>
+          <ns0:cNvSpPr/>
+          <ns0:nvPr>
+            <ns0:ph type="body" sz="quarter" idx="1"/>
+          </ns0:nvPr>
+        </ns0:nvSpPr>
+        <ns0:spPr>
+          <ns1:prstGeom prst="rect">
+            <ns1:avLst/>
+          </ns1:prstGeom>
+        </ns0:spPr>
+        <ns0:txBody>
+          <ns1:bodyPr/>
+          <ns1:lstStyle/>
+          <ns1:p>
+            <ns1:pPr>
+              <ns1:buNone/>
+            </ns1:pPr>
+            <ns1:r>
+              <ns1:t/>
+            </ns1:r>
+          </ns1:p>
+          <ns1:p>
+            <ns1:pPr>
+              <ns1:buNone/>
+            </ns1:pPr>
+            <ns1:r>
+              <ns1:t/>
+            </ns1:r>
+          </ns1:p>
+          <ns1:p>
+            <ns1:pPr>
+              <ns1:buNone/>
+            </ns1:pPr>
+            <ns1:r>
+              <ns1:t/>
+            </ns1:r>
+          </ns1:p>
+          <ns1:p>
+            <ns1:pPr>
+              <ns1:buNone/>
+            </ns1:pPr>
+            <ns1:r>
+              <ns1:t/>
+            </ns1:r>
+          </ns1:p>
+          <ns1:p>
+            <ns1:pPr>
+              <ns1:buNone/>
+            </ns1:pPr>
+            <ns1:r>
+              <ns1:t/>
+            </ns1:r>
+          </ns1:p>
+          <ns1:p>
+            <ns1:pPr>
+              <ns1:buNone/>
+            </ns1:pPr>
+            <ns1:r>
+              <ns1:t/>
+            </ns1:r>
+          </ns1:p>
+          <ns1:p>
+            <ns1:pPr>
+              <ns1:buNone/>
+            </ns1:pPr>
+            <ns1:r>
+              <ns1:t/>
+            </ns1:r>
+          </ns1:p>
+          <ns1:p>
+            <ns1:pPr>
+              <ns1:buNone/>
+            </ns1:pPr>
+            <ns1:r>
+              <ns1:t/>
+            </ns1:r>
+          </ns1:p>
+          <ns1:p>
+            <ns1:pPr>
+              <ns1:buNone/>
+            </ns1:pPr>
+            <ns1:r>
+              <ns1:t/>
+            </ns1:r>
+          </ns1:p>
+        </ns0:txBody>
+      </ns0:sp>
+    </ns0:spTree>
+  </ns0:cSld>
+  <ns0:clrMapOvr>
+    <ns1:masterClrMapping/>
+  </ns0:clrMapOvr>
+</ns0:notes>
 </file>
 
 <file path=ppt/notesSlides/notesSlide9.xml><?xml version="1.0" encoding="utf-8"?>
-<p:notes xmlns:a="http://schemas.openxmlformats.org/drawingml/2006/main" xmlns:r="http://schemas.openxmlformats.org/officeDocument/2006/relationships" xmlns:p="http://schemas.openxmlformats.org/presentationml/2006/main" xmlns:m="http://schemas.openxmlformats.org/officeDocument/2006/math" xmlns:a14="http://schemas.microsoft.com/office/drawing/2010/main" showMasterSp="1" showMasterPhAnim="1">
-  <p:cSld>
-    <p:spTree>
-      <p:nvGrpSpPr>
-        <p:cNvPr id="1" name=""/>
-        <p:cNvGrpSpPr/>
-        <p:nvPr/>
-      </p:nvGrpSpPr>
-      <p:grpSpPr>
-        <a:xfrm>
-          <a:off x="0" y="0"/>
-          <a:ext cx="0" cy="0"/>
-          <a:chOff x="0" y="0"/>
-          <a:chExt cx="0" cy="0"/>
-        </a:xfrm>
-      </p:grpSpPr>
-      <p:sp>
-        <p:nvSpPr>
-          <p:cNvPr id="71" name="Shape 71"/>
-          <p:cNvSpPr/>
-          <p:nvPr>
-            <p:ph type="sldImg"/>
-          </p:nvPr>
-        </p:nvSpPr>
-        <p:spPr>
-          <a:prstGeom prst="rect">
-            <a:avLst/>
-          </a:prstGeom>
-        </p:spPr>
-        <p:txBody>
-          <a:bodyPr/>
-          <a:lstStyle/>
-          <a:p>
-            <a:pPr/>
-          </a:p>
-        </p:txBody>
-      </p:sp>
-      <p:sp>
-        <p:nvSpPr>
-          <p:cNvPr id="72" name="Shape 72"/>
-          <p:cNvSpPr/>
-          <p:nvPr>
-            <p:ph type="body" sz="quarter" idx="1"/>
-          </p:nvPr>
-        </p:nvSpPr>
-        <p:spPr>
-          <a:prstGeom prst="rect">
-            <a:avLst/>
-          </a:prstGeom>
-        </p:spPr>
-        <p:txBody>
-          <a:bodyPr/>
-          <a:lstStyle/>
-          <a:p>
-            <a:pPr>
-              <a:buNone/>
-            </a:pPr>
-            <a:r>
-              <a:t>[9장 · 약 65초]</a:t>
-            </a:r>
-          </a:p>
-          <a:p>
-            <a:pPr>
-              <a:buNone/>
-            </a:pPr>
-            <a:r>
-              <a:t/>
-            </a:r>
-          </a:p>
-          <a:p>
-            <a:pPr>
-              <a:buNone/>
-            </a:pPr>
-            <a:r>
-              <a:t>구현은 메일을 읽고 질문에 답하는 기능에서 시작했습니다. 이후에 사용자별 여행을 저장하고, 장소 추천과 일정 편집을 차례로 연결했습니다. 한 번에 모든 기능을 만들기보다는 앞에서 저장한 정보를 다음 기능이 재사용하도록 확장했습니다.</a:t>
-            </a:r>
-          </a:p>
-          <a:p>
-            <a:pPr>
-              <a:buNone/>
-            </a:pPr>
-            <a:r>
-              <a:t/>
-            </a:r>
-          </a:p>
-          <a:p>
-            <a:pPr>
-              <a:buNone/>
-            </a:pPr>
-            <a:r>
-              <a:t>화면은 웹으로 만들었고, 뒤에서는 파이썬의 FastAPI가 요청을 처리합니다. 사용자가 고른 여행을 기준으로 예약과 장소를 읽어 오는 역할을 합니다.</a:t>
-            </a:r>
-          </a:p>
-          <a:p>
-            <a:pPr>
-              <a:buNone/>
-            </a:pPr>
-            <a:r>
-              <a:t/>
-            </a:r>
-          </a:p>
-          <a:p>
-            <a:pPr>
-              <a:buNone/>
-            </a:pPr>
-            <a:r>
-              <a:t>메일을 읽는 데는 OpenAI의 gpt-5-mini를 사용했습니다. 메일 본문을 검색할 때는 text-embedding-3-small로 문장의 의미를 비교합니다. 질문과 관련된 내용을 먼저 찾은 다음 AI가 답변하도록 연결한 방식입니다.</a:t>
-            </a:r>
-          </a:p>
-          <a:p>
-            <a:pPr>
-              <a:buNone/>
-            </a:pPr>
-            <a:r>
-              <a:t/>
-            </a:r>
-          </a:p>
-          <a:p>
-            <a:pPr>
-              <a:buNone/>
-            </a:pPr>
-            <a:r>
-              <a:t>여행 정보와 예약, 파일은 Supabase에 보관하고, 서버는 Render에 배포했습니다. 제 컴퓨터를 꺼도 접속하고 이전 여행을 다시 볼 수 있도록 하기 위해서입니다.</a:t>
-            </a:r>
-          </a:p>
-          <a:p>
-            <a:pPr>
-              <a:buNone/>
-            </a:pPr>
-            <a:r>
-              <a:t/>
-            </a:r>
-          </a:p>
-          <a:p>
-            <a:pPr>
-              <a:buNone/>
-            </a:pPr>
-            <a:r>
-              <a:t>분석처럼 오래 걸리는 작업은 진행 상태를 저장합니다. 새로고침했다고 작업이 처음부터 다시 시작되거나, 끝났는지 알 수 없으면 불편하기 때문입니다. 이런 부분까지 연결해야 실제로 계속 사용할 수 있는 서비스가 된다고 생각했습니다.</a:t>
-            </a:r>
-          </a:p>
-        </p:txBody>
-      </p:sp>
-    </p:spTree>
-  </p:cSld>
-  <p:clrMapOvr>
-    <a:masterClrMapping/>
-  </p:clrMapOvr>
-</p:notes>
+<ns0:notes xmlns:ns0="http://schemas.openxmlformats.org/presentationml/2006/main" xmlns:ns1="http://schemas.openxmlformats.org/drawingml/2006/main" showMasterSp="1" showMasterPhAnim="1">
+  <ns0:cSld>
+    <ns0:spTree>
+      <ns0:nvGrpSpPr>
+        <ns0:cNvPr id="1" name=""/>
+        <ns0:cNvGrpSpPr/>
+        <ns0:nvPr/>
+      </ns0:nvGrpSpPr>
+      <ns0:grpSpPr>
+        <ns1:xfrm>
+          <ns1:off x="0" y="0"/>
+          <ns1:ext cx="0" cy="0"/>
+          <ns1:chOff x="0" y="0"/>
+          <ns1:chExt cx="0" cy="0"/>
+        </ns1:xfrm>
+      </ns0:grpSpPr>
+      <ns0:sp>
+        <ns0:nvSpPr>
+          <ns0:cNvPr id="71" name="Shape 71"/>
+          <ns0:cNvSpPr/>
+          <ns0:nvPr>
+            <ns0:ph type="sldImg"/>
+          </ns0:nvPr>
+        </ns0:nvSpPr>
+        <ns0:spPr>
+          <ns1:prstGeom prst="rect">
+            <ns1:avLst/>
+          </ns1:prstGeom>
+        </ns0:spPr>
+        <ns0:txBody>
+          <ns1:bodyPr/>
+          <ns1:lstStyle/>
+          <ns1:p>
+            <ns1:pPr/>
+          </ns1:p>
+        </ns0:txBody>
+      </ns0:sp>
+      <ns0:sp>
+        <ns0:nvSpPr>
+          <ns0:cNvPr id="72" name="Shape 72"/>
+          <ns0:cNvSpPr/>
+          <ns0:nvPr>
+            <ns0:ph type="body" sz="quarter" idx="1"/>
+          </ns0:nvPr>
+        </ns0:nvSpPr>
+        <ns0:spPr>
+          <ns1:prstGeom prst="rect">
+            <ns1:avLst/>
+          </ns1:prstGeom>
+        </ns0:spPr>
+        <ns0:txBody>
+          <ns1:bodyPr/>
+          <ns1:lstStyle/>
+          <ns1:p>
+            <ns1:pPr>
+              <ns1:buNone/>
+            </ns1:pPr>
+            <ns1:r>
+              <ns1:t/>
+            </ns1:r>
+          </ns1:p>
+          <ns1:p>
+            <ns1:pPr>
+              <ns1:buNone/>
+            </ns1:pPr>
+            <ns1:r>
+              <ns1:t/>
+            </ns1:r>
+          </ns1:p>
+          <ns1:p>
+            <ns1:pPr>
+              <ns1:buNone/>
+            </ns1:pPr>
+            <ns1:r>
+              <ns1:t/>
+            </ns1:r>
+          </ns1:p>
+          <ns1:p>
+            <ns1:pPr>
+              <ns1:buNone/>
+            </ns1:pPr>
+            <ns1:r>
+              <ns1:t/>
+            </ns1:r>
+          </ns1:p>
+          <ns1:p>
+            <ns1:pPr>
+              <ns1:buNone/>
+            </ns1:pPr>
+            <ns1:r>
+              <ns1:t/>
+            </ns1:r>
+          </ns1:p>
+          <ns1:p>
+            <ns1:pPr>
+              <ns1:buNone/>
+            </ns1:pPr>
+            <ns1:r>
+              <ns1:t/>
+            </ns1:r>
+          </ns1:p>
+          <ns1:p>
+            <ns1:pPr>
+              <ns1:buNone/>
+            </ns1:pPr>
+            <ns1:r>
+              <ns1:t/>
+            </ns1:r>
+          </ns1:p>
+          <ns1:p>
+            <ns1:pPr>
+              <ns1:buNone/>
+            </ns1:pPr>
+            <ns1:r>
+              <ns1:t/>
+            </ns1:r>
+          </ns1:p>
+          <ns1:p>
+            <ns1:pPr>
+              <ns1:buNone/>
+            </ns1:pPr>
+            <ns1:r>
+              <ns1:t/>
+            </ns1:r>
+          </ns1:p>
+          <ns1:p>
+            <ns1:pPr>
+              <ns1:buNone/>
+            </ns1:pPr>
+            <ns1:r>
+              <ns1:t/>
+            </ns1:r>
+          </ns1:p>
+          <ns1:p>
+            <ns1:pPr>
+              <ns1:buNone/>
+            </ns1:pPr>
+            <ns1:r>
+              <ns1:t/>
+            </ns1:r>
+          </ns1:p>
+        </ns0:txBody>
+      </ns0:sp>
+    </ns0:spTree>
+  </ns0:cSld>
+  <ns0:clrMapOvr>
+    <ns1:masterClrMapping/>
+  </ns0:clrMapOvr>
+</ns0:notes>
 </file>
 
 <file path=ppt/slideLayouts/slideLayout1.xml><?xml version="1.0" encoding="utf-8"?>
